--- a/IKT_SMH/11evfolyam_BiztonsagosCsalad/Biztonságos család az interneten.pptx
+++ b/IKT_SMH/11evfolyam_BiztonsagosCsalad/Biztonságos család az interneten.pptx
@@ -19,6 +19,7 @@
     <p:sldId id="267" r:id="rId13"/>
     <p:sldId id="268" r:id="rId14"/>
     <p:sldId id="269" r:id="rId15"/>
+    <p:sldId id="270" r:id="rId16"/>
   </p:sldIdLst>
   <p:sldSz cx="12192000" cy="6858000"/>
   <p:notesSz cx="6858000" cy="9144000"/>
@@ -117,6 +118,11 @@
       </a:defRPr>
     </a:lvl9pPr>
   </p:defaultTextStyle>
+  <p:extLst>
+    <p:ext uri="{EFAFB233-063F-42B5-8137-9DF3F51BA10A}">
+      <p15:sldGuideLst xmlns:p15="http://schemas.microsoft.com/office/powerpoint/2012/main"/>
+    </p:ext>
+  </p:extLst>
 </p:presentation>
 </file>
 
@@ -312,7 +318,7 @@
             <a:fld id="{B61BEF0D-F0BB-DE4B-95CE-6DB70DBA9567}" type="datetimeFigureOut">
               <a:rPr lang="en-US" dirty="0"/>
               <a:pPr/>
-              <a:t>9/4/2026</a:t>
+              <a:t>9/11/2026</a:t>
             </a:fld>
             <a:endParaRPr lang="en-US" dirty="0"/>
           </a:p>
@@ -745,7 +751,7 @@
             <a:fld id="{B61BEF0D-F0BB-DE4B-95CE-6DB70DBA9567}" type="datetimeFigureOut">
               <a:rPr lang="en-US" dirty="0"/>
               <a:pPr/>
-              <a:t>9/4/2026</a:t>
+              <a:t>9/11/2026</a:t>
             </a:fld>
             <a:endParaRPr lang="en-US" dirty="0"/>
           </a:p>
@@ -992,7 +998,7 @@
             <a:fld id="{B61BEF0D-F0BB-DE4B-95CE-6DB70DBA9567}" type="datetimeFigureOut">
               <a:rPr lang="en-US" dirty="0"/>
               <a:pPr/>
-              <a:t>9/4/2026</a:t>
+              <a:t>9/11/2026</a:t>
             </a:fld>
             <a:endParaRPr lang="en-US" dirty="0"/>
           </a:p>
@@ -1297,7 +1303,7 @@
             <a:fld id="{B61BEF0D-F0BB-DE4B-95CE-6DB70DBA9567}" type="datetimeFigureOut">
               <a:rPr lang="en-US" dirty="0"/>
               <a:pPr/>
-              <a:t>9/4/2026</a:t>
+              <a:t>9/11/2026</a:t>
             </a:fld>
             <a:endParaRPr lang="en-US" dirty="0"/>
           </a:p>
@@ -1612,7 +1618,7 @@
             <a:fld id="{B61BEF0D-F0BB-DE4B-95CE-6DB70DBA9567}" type="datetimeFigureOut">
               <a:rPr lang="en-US" dirty="0"/>
               <a:pPr/>
-              <a:t>9/4/2026</a:t>
+              <a:t>9/11/2026</a:t>
             </a:fld>
             <a:endParaRPr lang="en-US" dirty="0"/>
           </a:p>
@@ -1911,7 +1917,7 @@
             <a:fld id="{B61BEF0D-F0BB-DE4B-95CE-6DB70DBA9567}" type="datetimeFigureOut">
               <a:rPr lang="en-US" dirty="0"/>
               <a:pPr/>
-              <a:t>9/4/2026</a:t>
+              <a:t>9/11/2026</a:t>
             </a:fld>
             <a:endParaRPr lang="en-US" dirty="0"/>
           </a:p>
@@ -2275,7 +2281,7 @@
             <a:fld id="{B61BEF0D-F0BB-DE4B-95CE-6DB70DBA9567}" type="datetimeFigureOut">
               <a:rPr lang="en-US" dirty="0"/>
               <a:pPr/>
-              <a:t>9/4/2026</a:t>
+              <a:t>9/11/2026</a:t>
             </a:fld>
             <a:endParaRPr lang="en-US" dirty="0"/>
           </a:p>
@@ -2446,7 +2452,7 @@
             <a:fld id="{B61BEF0D-F0BB-DE4B-95CE-6DB70DBA9567}" type="datetimeFigureOut">
               <a:rPr lang="en-US" dirty="0"/>
               <a:pPr/>
-              <a:t>9/4/2026</a:t>
+              <a:t>9/11/2026</a:t>
             </a:fld>
             <a:endParaRPr lang="en-US" dirty="0"/>
           </a:p>
@@ -2623,7 +2629,7 @@
             <a:fld id="{B61BEF0D-F0BB-DE4B-95CE-6DB70DBA9567}" type="datetimeFigureOut">
               <a:rPr lang="en-US" dirty="0"/>
               <a:pPr/>
-              <a:t>9/4/2026</a:t>
+              <a:t>9/11/2026</a:t>
             </a:fld>
             <a:endParaRPr lang="en-US" dirty="0"/>
           </a:p>
@@ -2790,7 +2796,7 @@
             <a:fld id="{B61BEF0D-F0BB-DE4B-95CE-6DB70DBA9567}" type="datetimeFigureOut">
               <a:rPr lang="en-US" dirty="0"/>
               <a:pPr/>
-              <a:t>9/4/2026</a:t>
+              <a:t>9/11/2026</a:t>
             </a:fld>
             <a:endParaRPr lang="en-US" dirty="0"/>
           </a:p>
@@ -3037,7 +3043,7 @@
             <a:fld id="{B61BEF0D-F0BB-DE4B-95CE-6DB70DBA9567}" type="datetimeFigureOut">
               <a:rPr lang="en-US" dirty="0"/>
               <a:pPr/>
-              <a:t>9/4/2026</a:t>
+              <a:t>9/11/2026</a:t>
             </a:fld>
             <a:endParaRPr lang="en-US" dirty="0"/>
           </a:p>
@@ -3270,7 +3276,7 @@
             <a:fld id="{B61BEF0D-F0BB-DE4B-95CE-6DB70DBA9567}" type="datetimeFigureOut">
               <a:rPr lang="en-US" dirty="0"/>
               <a:pPr/>
-              <a:t>9/4/2026</a:t>
+              <a:t>9/11/2026</a:t>
             </a:fld>
             <a:endParaRPr lang="en-US" dirty="0"/>
           </a:p>
@@ -3649,7 +3655,7 @@
             <a:fld id="{B61BEF0D-F0BB-DE4B-95CE-6DB70DBA9567}" type="datetimeFigureOut">
               <a:rPr lang="en-US" dirty="0"/>
               <a:pPr/>
-              <a:t>9/4/2026</a:t>
+              <a:t>9/11/2026</a:t>
             </a:fld>
             <a:endParaRPr lang="en-US" dirty="0"/>
           </a:p>
@@ -3764,7 +3770,7 @@
             <a:fld id="{B61BEF0D-F0BB-DE4B-95CE-6DB70DBA9567}" type="datetimeFigureOut">
               <a:rPr lang="en-US" dirty="0"/>
               <a:pPr/>
-              <a:t>9/4/2026</a:t>
+              <a:t>9/11/2026</a:t>
             </a:fld>
             <a:endParaRPr lang="en-US" dirty="0"/>
           </a:p>
@@ -3856,7 +3862,7 @@
             <a:fld id="{B61BEF0D-F0BB-DE4B-95CE-6DB70DBA9567}" type="datetimeFigureOut">
               <a:rPr lang="en-US" dirty="0"/>
               <a:pPr/>
-              <a:t>9/4/2026</a:t>
+              <a:t>9/11/2026</a:t>
             </a:fld>
             <a:endParaRPr lang="en-US" dirty="0"/>
           </a:p>
@@ -4108,7 +4114,7 @@
             <a:fld id="{B61BEF0D-F0BB-DE4B-95CE-6DB70DBA9567}" type="datetimeFigureOut">
               <a:rPr lang="en-US" dirty="0"/>
               <a:pPr/>
-              <a:t>9/4/2026</a:t>
+              <a:t>9/11/2026</a:t>
             </a:fld>
             <a:endParaRPr lang="en-US" dirty="0"/>
           </a:p>
@@ -4388,7 +4394,7 @@
             <a:fld id="{B61BEF0D-F0BB-DE4B-95CE-6DB70DBA9567}" type="datetimeFigureOut">
               <a:rPr lang="en-US" dirty="0"/>
               <a:pPr/>
-              <a:t>9/4/2026</a:t>
+              <a:t>9/11/2026</a:t>
             </a:fld>
             <a:endParaRPr lang="en-US" dirty="0"/>
           </a:p>
@@ -4791,7 +4797,7 @@
             <a:fld id="{B61BEF0D-F0BB-DE4B-95CE-6DB70DBA9567}" type="datetimeFigureOut">
               <a:rPr lang="en-US" dirty="0"/>
               <a:pPr/>
-              <a:t>9/4/2026</a:t>
+              <a:t>9/11/2026</a:t>
             </a:fld>
             <a:endParaRPr lang="en-US" dirty="0"/>
           </a:p>
@@ -5334,7 +5340,7 @@
         </p:nvSpPr>
         <p:spPr>
           <a:xfrm>
-            <a:off x="218990" y="689810"/>
+            <a:off x="427538" y="216845"/>
             <a:ext cx="11764462" cy="1491916"/>
           </a:xfrm>
         </p:spPr>
@@ -5345,7 +5351,9 @@
           <a:lstStyle/>
           <a:p>
             <a:r>
-              <a:rPr lang="hu-HU" sz="4400" b="1" dirty="0"/>
+              <a:rPr lang="hu-HU" sz="4400" b="1" dirty="0">
+                <a:latin typeface="Arial Rounded MT Bold" panose="020F0704030504030204" pitchFamily="34" charset="0"/>
+              </a:rPr>
               <a:t>Biztonságos család az interneten</a:t>
             </a:r>
           </a:p>
@@ -5374,26 +5382,38 @@
           <a:lstStyle/>
           <a:p>
             <a:r>
-              <a:rPr lang="hu-HU" dirty="0" smtClean="0"/>
+              <a:rPr lang="hu-HU" dirty="0" smtClean="0">
+                <a:latin typeface="Bahnschrift" panose="020B0502040204020203" pitchFamily="34" charset="0"/>
+              </a:rPr>
               <a:t>Készítette: </a:t>
             </a:r>
             <a:r>
-              <a:rPr lang="hu-HU" dirty="0" err="1" smtClean="0"/>
+              <a:rPr lang="hu-HU" dirty="0" err="1" smtClean="0">
+                <a:latin typeface="Bahnschrift" panose="020B0502040204020203" pitchFamily="34" charset="0"/>
+              </a:rPr>
               <a:t>Ignáth</a:t>
             </a:r>
             <a:r>
-              <a:rPr lang="hu-HU" dirty="0" smtClean="0"/>
+              <a:rPr lang="hu-HU" dirty="0" smtClean="0">
+                <a:latin typeface="Bahnschrift" panose="020B0502040204020203" pitchFamily="34" charset="0"/>
+              </a:rPr>
               <a:t> </a:t>
             </a:r>
             <a:r>
-              <a:rPr lang="hu-HU" dirty="0" err="1" smtClean="0"/>
+              <a:rPr lang="hu-HU" dirty="0" err="1" smtClean="0">
+                <a:latin typeface="Bahnschrift" panose="020B0502040204020203" pitchFamily="34" charset="0"/>
+              </a:rPr>
               <a:t>Bejámin</a:t>
             </a:r>
             <a:r>
-              <a:rPr lang="hu-HU" dirty="0" smtClean="0"/>
+              <a:rPr lang="hu-HU" dirty="0" smtClean="0">
+                <a:latin typeface="Bahnschrift" panose="020B0502040204020203" pitchFamily="34" charset="0"/>
+              </a:rPr>
               <a:t>, Lukács Levente Péter, Kövesfalvi Dominik</a:t>
             </a:r>
-            <a:endParaRPr lang="hu-HU" dirty="0"/>
+            <a:endParaRPr lang="hu-HU" dirty="0">
+              <a:latin typeface="Bahnschrift" panose="020B0502040204020203" pitchFamily="34" charset="0"/>
+            </a:endParaRPr>
           </a:p>
         </p:txBody>
       </p:sp>
@@ -5406,7 +5426,7 @@
         <p:spPr>
           <a:xfrm>
             <a:off x="577516" y="2695074"/>
-            <a:ext cx="6015789" cy="1323439"/>
+            <a:ext cx="6015789" cy="1015663"/>
           </a:xfrm>
           <a:prstGeom prst="rect">
             <a:avLst/>
@@ -5420,7 +5440,9 @@
           <a:lstStyle/>
           <a:p>
             <a:r>
-              <a:rPr lang="hu-HU" sz="2000" dirty="0"/>
+              <a:rPr lang="hu-HU" sz="2000" dirty="0">
+                <a:latin typeface="Bahnschrift" panose="020B0502040204020203" pitchFamily="34" charset="0"/>
+              </a:rPr>
               <a:t>A weboldalunk egy fiktív család, a Kovács család példáján keresztül mutatja be a leggyakoribb internetes veszélyeket és azok megelőzését.</a:t>
             </a:r>
           </a:p>
@@ -5479,77 +5501,119 @@
           <a:lstStyle/>
           <a:p>
             <a:r>
-              <a:rPr lang="hu-HU" sz="2000" dirty="0"/>
+              <a:rPr lang="hu-HU" sz="2000" dirty="0">
+                <a:latin typeface="Bahnschrift" panose="020B0502040204020203" pitchFamily="34" charset="0"/>
+              </a:rPr>
               <a:t>A helyes megoldás az, hogy nem kattint a hivatkozásra, nem adja meg az adatait, és nem válaszol az üzenetre. Ha szükséges, a szolgáltató hivatalos weboldalán keresztül ellenőrzi, hogy valóban történt-e ilyen értesítés.</a:t>
             </a:r>
             <a:br>
-              <a:rPr lang="hu-HU" sz="2000" dirty="0"/>
-            </a:br>
-            <a:r>
-              <a:rPr lang="hu-HU" sz="2000" dirty="0"/>
+              <a:rPr lang="hu-HU" sz="2000" dirty="0">
+                <a:latin typeface="Bahnschrift" panose="020B0502040204020203" pitchFamily="34" charset="0"/>
+              </a:rPr>
+            </a:br>
+            <a:r>
+              <a:rPr lang="hu-HU" sz="2000" dirty="0">
+                <a:latin typeface="Bahnschrift" panose="020B0502040204020203" pitchFamily="34" charset="0"/>
+              </a:rPr>
               <a:t/>
             </a:r>
             <a:br>
-              <a:rPr lang="hu-HU" sz="2000" dirty="0"/>
-            </a:br>
-            <a:r>
-              <a:rPr lang="hu-HU" sz="2000" dirty="0"/>
+              <a:rPr lang="hu-HU" sz="2000" dirty="0">
+                <a:latin typeface="Bahnschrift" panose="020B0502040204020203" pitchFamily="34" charset="0"/>
+              </a:rPr>
+            </a:br>
+            <a:r>
+              <a:rPr lang="hu-HU" sz="2000" dirty="0">
+                <a:latin typeface="Bahnschrift" panose="020B0502040204020203" pitchFamily="34" charset="0"/>
+              </a:rPr>
               <a:t>Éva esete</a:t>
             </a:r>
             <a:br>
-              <a:rPr lang="hu-HU" sz="2000" dirty="0"/>
-            </a:br>
-            <a:r>
-              <a:rPr lang="hu-HU" sz="2000" dirty="0"/>
+              <a:rPr lang="hu-HU" sz="2000" dirty="0">
+                <a:latin typeface="Bahnschrift" panose="020B0502040204020203" pitchFamily="34" charset="0"/>
+              </a:rPr>
+            </a:br>
+            <a:r>
+              <a:rPr lang="hu-HU" sz="2000" dirty="0">
+                <a:latin typeface="Bahnschrift" panose="020B0502040204020203" pitchFamily="34" charset="0"/>
+              </a:rPr>
               <a:t>Éva SMS-t kap egy webáruház nevében, amely szerint probléma van a csomagjával. Az üzenet egy hivatkozást tartalmaz, ahol állítólag újra meg kell adnia a bankkártyaadatait.</a:t>
             </a:r>
             <a:br>
-              <a:rPr lang="hu-HU" sz="2000" dirty="0"/>
-            </a:br>
-            <a:r>
-              <a:rPr lang="hu-HU" sz="2000" dirty="0"/>
+              <a:rPr lang="hu-HU" sz="2000" dirty="0">
+                <a:latin typeface="Bahnschrift" panose="020B0502040204020203" pitchFamily="34" charset="0"/>
+              </a:rPr>
+            </a:br>
+            <a:r>
+              <a:rPr lang="hu-HU" sz="2000" dirty="0">
+                <a:latin typeface="Bahnschrift" panose="020B0502040204020203" pitchFamily="34" charset="0"/>
+              </a:rPr>
               <a:t/>
             </a:r>
             <a:br>
-              <a:rPr lang="hu-HU" sz="2000" dirty="0"/>
-            </a:br>
-            <a:r>
-              <a:rPr lang="hu-HU" sz="2000" dirty="0"/>
+              <a:rPr lang="hu-HU" sz="2000" dirty="0">
+                <a:latin typeface="Bahnschrift" panose="020B0502040204020203" pitchFamily="34" charset="0"/>
+              </a:rPr>
+            </a:br>
+            <a:r>
+              <a:rPr lang="hu-HU" sz="2000" dirty="0">
+                <a:latin typeface="Bahnschrift" panose="020B0502040204020203" pitchFamily="34" charset="0"/>
+              </a:rPr>
               <a:t>Éva nem a kapott linkre kattint, hanem közvetlenül megnyitja a webáruház hivatalos oldalát, és ott ellenőrzi a rendelés állapotát.</a:t>
             </a:r>
             <a:br>
-              <a:rPr lang="hu-HU" sz="2000" dirty="0"/>
-            </a:br>
-            <a:r>
-              <a:rPr lang="hu-HU" sz="2000" dirty="0"/>
+              <a:rPr lang="hu-HU" sz="2000" dirty="0">
+                <a:latin typeface="Bahnschrift" panose="020B0502040204020203" pitchFamily="34" charset="0"/>
+              </a:rPr>
+            </a:br>
+            <a:r>
+              <a:rPr lang="hu-HU" sz="2000" dirty="0">
+                <a:latin typeface="Bahnschrift" panose="020B0502040204020203" pitchFamily="34" charset="0"/>
+              </a:rPr>
               <a:t/>
             </a:r>
             <a:br>
-              <a:rPr lang="hu-HU" sz="2000" dirty="0"/>
-            </a:br>
-            <a:r>
-              <a:rPr lang="hu-HU" sz="2000" dirty="0"/>
+              <a:rPr lang="hu-HU" sz="2000" dirty="0">
+                <a:latin typeface="Bahnschrift" panose="020B0502040204020203" pitchFamily="34" charset="0"/>
+              </a:rPr>
+            </a:br>
+            <a:r>
+              <a:rPr lang="hu-HU" sz="2000" dirty="0">
+                <a:latin typeface="Bahnschrift" panose="020B0502040204020203" pitchFamily="34" charset="0"/>
+              </a:rPr>
               <a:t>Alapszabály</a:t>
             </a:r>
             <a:br>
-              <a:rPr lang="hu-HU" sz="2000" dirty="0"/>
-            </a:br>
-            <a:r>
-              <a:rPr lang="hu-HU" sz="2000" dirty="0"/>
+              <a:rPr lang="hu-HU" sz="2000" dirty="0">
+                <a:latin typeface="Bahnschrift" panose="020B0502040204020203" pitchFamily="34" charset="0"/>
+              </a:rPr>
+            </a:br>
+            <a:r>
+              <a:rPr lang="hu-HU" sz="2000" dirty="0">
+                <a:latin typeface="Bahnschrift" panose="020B0502040204020203" pitchFamily="34" charset="0"/>
+              </a:rPr>
               <a:t>Állj meg – gondolkodj – ellenőrizz!</a:t>
             </a:r>
             <a:br>
-              <a:rPr lang="hu-HU" sz="2000" dirty="0"/>
-            </a:br>
-            <a:r>
-              <a:rPr lang="hu-HU" sz="2000" dirty="0"/>
+              <a:rPr lang="hu-HU" sz="2000" dirty="0">
+                <a:latin typeface="Bahnschrift" panose="020B0502040204020203" pitchFamily="34" charset="0"/>
+              </a:rPr>
+            </a:br>
+            <a:r>
+              <a:rPr lang="hu-HU" sz="2000" dirty="0">
+                <a:latin typeface="Bahnschrift" panose="020B0502040204020203" pitchFamily="34" charset="0"/>
+              </a:rPr>
               <a:t/>
             </a:r>
             <a:br>
-              <a:rPr lang="hu-HU" sz="2000" dirty="0"/>
-            </a:br>
-            <a:r>
-              <a:rPr lang="hu-HU" sz="2000" dirty="0"/>
+              <a:rPr lang="hu-HU" sz="2000" dirty="0">
+                <a:latin typeface="Bahnschrift" panose="020B0502040204020203" pitchFamily="34" charset="0"/>
+              </a:rPr>
+            </a:br>
+            <a:r>
+              <a:rPr lang="hu-HU" sz="2000" dirty="0">
+                <a:latin typeface="Bahnschrift" panose="020B0502040204020203" pitchFamily="34" charset="0"/>
+              </a:rPr>
               <a:t>Ha egy üzenet sürget vagy megijeszt, ne reagáljunk azonnal. Ellenőrizzük az információt megbízható, hivatalos forrásból.</a:t>
             </a:r>
           </a:p>
@@ -5608,148 +5672,230 @@
           <a:lstStyle/>
           <a:p>
             <a:r>
-              <a:rPr lang="hu-HU" sz="1600" dirty="0"/>
+              <a:rPr lang="hu-HU" sz="1600" dirty="0">
+                <a:latin typeface="Bahnschrift" panose="020B0502040204020203" pitchFamily="34" charset="0"/>
+              </a:rPr>
               <a:t>A közösségi média előnyei és veszélyei</a:t>
             </a:r>
             <a:br>
-              <a:rPr lang="hu-HU" sz="1600" dirty="0"/>
-            </a:br>
-            <a:r>
-              <a:rPr lang="hu-HU" sz="1600" dirty="0"/>
+              <a:rPr lang="hu-HU" sz="1600" dirty="0">
+                <a:latin typeface="Bahnschrift" panose="020B0502040204020203" pitchFamily="34" charset="0"/>
+              </a:rPr>
+            </a:br>
+            <a:r>
+              <a:rPr lang="hu-HU" sz="1600" dirty="0">
+                <a:latin typeface="Bahnschrift" panose="020B0502040204020203" pitchFamily="34" charset="0"/>
+              </a:rPr>
               <a:t>A közösségi média segítségével kapcsolatot tarthatunk másokkal, megoszthatjuk élményeinket és érdekes tartalmakat találhatunk. Ugyanakkor fontos tudatosan használni ezeket a platformokat.</a:t>
             </a:r>
             <a:br>
-              <a:rPr lang="hu-HU" sz="1600" dirty="0"/>
-            </a:br>
-            <a:r>
-              <a:rPr lang="hu-HU" sz="1600" dirty="0"/>
+              <a:rPr lang="hu-HU" sz="1600" dirty="0">
+                <a:latin typeface="Bahnschrift" panose="020B0502040204020203" pitchFamily="34" charset="0"/>
+              </a:rPr>
+            </a:br>
+            <a:r>
+              <a:rPr lang="hu-HU" sz="1600" dirty="0">
+                <a:latin typeface="Bahnschrift" panose="020B0502040204020203" pitchFamily="34" charset="0"/>
+              </a:rPr>
               <a:t/>
             </a:r>
             <a:br>
-              <a:rPr lang="hu-HU" sz="1600" dirty="0"/>
-            </a:br>
-            <a:r>
-              <a:rPr lang="hu-HU" sz="1600" dirty="0"/>
+              <a:rPr lang="hu-HU" sz="1600" dirty="0">
+                <a:latin typeface="Bahnschrift" panose="020B0502040204020203" pitchFamily="34" charset="0"/>
+              </a:rPr>
+            </a:br>
+            <a:r>
+              <a:rPr lang="hu-HU" sz="1600" dirty="0">
+                <a:latin typeface="Bahnschrift" panose="020B0502040204020203" pitchFamily="34" charset="0"/>
+              </a:rPr>
               <a:t>Anna története</a:t>
             </a:r>
             <a:br>
-              <a:rPr lang="hu-HU" sz="1600" dirty="0"/>
-            </a:br>
-            <a:r>
-              <a:rPr lang="hu-HU" sz="1600" dirty="0"/>
+              <a:rPr lang="hu-HU" sz="1600" dirty="0">
+                <a:latin typeface="Bahnschrift" panose="020B0502040204020203" pitchFamily="34" charset="0"/>
+              </a:rPr>
+            </a:br>
+            <a:r>
+              <a:rPr lang="hu-HU" sz="1600" dirty="0">
+                <a:latin typeface="Bahnschrift" panose="020B0502040204020203" pitchFamily="34" charset="0"/>
+              </a:rPr>
               <a:t>Anna egy nyilvános profilban rendszeresen megosztja, hogy hová jár iskolába, hol lakik, mikor megy nyaralni, és fényképeket tölt fel a barátairól.</a:t>
             </a:r>
             <a:br>
-              <a:rPr lang="hu-HU" sz="1600" dirty="0"/>
-            </a:br>
-            <a:r>
-              <a:rPr lang="hu-HU" sz="1600" dirty="0"/>
+              <a:rPr lang="hu-HU" sz="1600" dirty="0">
+                <a:latin typeface="Bahnschrift" panose="020B0502040204020203" pitchFamily="34" charset="0"/>
+              </a:rPr>
+            </a:br>
+            <a:r>
+              <a:rPr lang="hu-HU" sz="1600" dirty="0">
+                <a:latin typeface="Bahnschrift" panose="020B0502040204020203" pitchFamily="34" charset="0"/>
+              </a:rPr>
               <a:t/>
             </a:r>
             <a:br>
-              <a:rPr lang="hu-HU" sz="1600" dirty="0"/>
-            </a:br>
-            <a:r>
-              <a:rPr lang="hu-HU" sz="1600" dirty="0"/>
+              <a:rPr lang="hu-HU" sz="1600" dirty="0">
+                <a:latin typeface="Bahnschrift" panose="020B0502040204020203" pitchFamily="34" charset="0"/>
+              </a:rPr>
+            </a:br>
+            <a:r>
+              <a:rPr lang="hu-HU" sz="1600" dirty="0">
+                <a:latin typeface="Bahnschrift" panose="020B0502040204020203" pitchFamily="34" charset="0"/>
+              </a:rPr>
               <a:t>Ezek az információk együtt túl sokat árulhatnak el róla.</a:t>
             </a:r>
             <a:br>
-              <a:rPr lang="hu-HU" sz="1600" dirty="0"/>
-            </a:br>
-            <a:r>
-              <a:rPr lang="hu-HU" sz="1600" dirty="0"/>
+              <a:rPr lang="hu-HU" sz="1600" dirty="0">
+                <a:latin typeface="Bahnschrift" panose="020B0502040204020203" pitchFamily="34" charset="0"/>
+              </a:rPr>
+            </a:br>
+            <a:r>
+              <a:rPr lang="hu-HU" sz="1600" dirty="0">
+                <a:latin typeface="Bahnschrift" panose="020B0502040204020203" pitchFamily="34" charset="0"/>
+              </a:rPr>
               <a:t/>
             </a:r>
             <a:br>
-              <a:rPr lang="hu-HU" sz="1600" dirty="0"/>
-            </a:br>
-            <a:r>
-              <a:rPr lang="hu-HU" sz="1600" dirty="0"/>
+              <a:rPr lang="hu-HU" sz="1600" dirty="0">
+                <a:latin typeface="Bahnschrift" panose="020B0502040204020203" pitchFamily="34" charset="0"/>
+              </a:rPr>
+            </a:br>
+            <a:r>
+              <a:rPr lang="hu-HU" sz="1600" dirty="0">
+                <a:latin typeface="Bahnschrift" panose="020B0502040204020203" pitchFamily="34" charset="0"/>
+              </a:rPr>
               <a:t>Hogyan használjuk biztonságosan?</a:t>
             </a:r>
             <a:br>
-              <a:rPr lang="hu-HU" sz="1600" dirty="0"/>
-            </a:br>
-            <a:r>
-              <a:rPr lang="hu-HU" sz="1600" dirty="0"/>
+              <a:rPr lang="hu-HU" sz="1600" dirty="0">
+                <a:latin typeface="Bahnschrift" panose="020B0502040204020203" pitchFamily="34" charset="0"/>
+              </a:rPr>
+            </a:br>
+            <a:r>
+              <a:rPr lang="hu-HU" sz="1600" dirty="0">
+                <a:latin typeface="Bahnschrift" panose="020B0502040204020203" pitchFamily="34" charset="0"/>
+              </a:rPr>
               <a:t>Állítsuk be úgy a profilunkat, hogy személyes tartalmainkat csak azok láthassák, akiknek valóban meg szeretnénk mutatni.</a:t>
             </a:r>
             <a:br>
-              <a:rPr lang="hu-HU" sz="1600" dirty="0"/>
-            </a:br>
-            <a:r>
-              <a:rPr lang="hu-HU" sz="1600" dirty="0"/>
+              <a:rPr lang="hu-HU" sz="1600" dirty="0">
+                <a:latin typeface="Bahnschrift" panose="020B0502040204020203" pitchFamily="34" charset="0"/>
+              </a:rPr>
+            </a:br>
+            <a:r>
+              <a:rPr lang="hu-HU" sz="1600" dirty="0">
+                <a:latin typeface="Bahnschrift" panose="020B0502040204020203" pitchFamily="34" charset="0"/>
+              </a:rPr>
               <a:t/>
             </a:r>
             <a:br>
-              <a:rPr lang="hu-HU" sz="1600" dirty="0"/>
-            </a:br>
-            <a:r>
-              <a:rPr lang="hu-HU" sz="1600" dirty="0"/>
+              <a:rPr lang="hu-HU" sz="1600" dirty="0">
+                <a:latin typeface="Bahnschrift" panose="020B0502040204020203" pitchFamily="34" charset="0"/>
+              </a:rPr>
+            </a:br>
+            <a:r>
+              <a:rPr lang="hu-HU" sz="1600" dirty="0">
+                <a:latin typeface="Bahnschrift" panose="020B0502040204020203" pitchFamily="34" charset="0"/>
+              </a:rPr>
               <a:t>Ne </a:t>
             </a:r>
             <a:r>
-              <a:rPr lang="hu-HU" sz="1600" dirty="0" err="1"/>
+              <a:rPr lang="hu-HU" sz="1600" dirty="0" err="1">
+                <a:latin typeface="Bahnschrift" panose="020B0502040204020203" pitchFamily="34" charset="0"/>
+              </a:rPr>
               <a:t>osszunk</a:t>
             </a:r>
             <a:r>
-              <a:rPr lang="hu-HU" sz="1600" dirty="0"/>
+              <a:rPr lang="hu-HU" sz="1600" dirty="0">
+                <a:latin typeface="Bahnschrift" panose="020B0502040204020203" pitchFamily="34" charset="0"/>
+              </a:rPr>
               <a:t> meg nyilvánosan:</a:t>
             </a:r>
             <a:br>
-              <a:rPr lang="hu-HU" sz="1600" dirty="0"/>
-            </a:br>
-            <a:r>
-              <a:rPr lang="hu-HU" sz="1600" dirty="0"/>
+              <a:rPr lang="hu-HU" sz="1600" dirty="0">
+                <a:latin typeface="Bahnschrift" panose="020B0502040204020203" pitchFamily="34" charset="0"/>
+              </a:rPr>
+            </a:br>
+            <a:r>
+              <a:rPr lang="hu-HU" sz="1600" dirty="0">
+                <a:latin typeface="Bahnschrift" panose="020B0502040204020203" pitchFamily="34" charset="0"/>
+              </a:rPr>
               <a:t/>
             </a:r>
             <a:br>
-              <a:rPr lang="hu-HU" sz="1600" dirty="0"/>
-            </a:br>
-            <a:r>
-              <a:rPr lang="hu-HU" sz="1600" dirty="0"/>
+              <a:rPr lang="hu-HU" sz="1600" dirty="0">
+                <a:latin typeface="Bahnschrift" panose="020B0502040204020203" pitchFamily="34" charset="0"/>
+              </a:rPr>
+            </a:br>
+            <a:r>
+              <a:rPr lang="hu-HU" sz="1600" dirty="0">
+                <a:latin typeface="Bahnschrift" panose="020B0502040204020203" pitchFamily="34" charset="0"/>
+              </a:rPr>
               <a:t>lakcímet;</a:t>
             </a:r>
             <a:br>
-              <a:rPr lang="hu-HU" sz="1600" dirty="0"/>
-            </a:br>
-            <a:r>
-              <a:rPr lang="hu-HU" sz="1600" dirty="0"/>
+              <a:rPr lang="hu-HU" sz="1600" dirty="0">
+                <a:latin typeface="Bahnschrift" panose="020B0502040204020203" pitchFamily="34" charset="0"/>
+              </a:rPr>
+            </a:br>
+            <a:r>
+              <a:rPr lang="hu-HU" sz="1600" dirty="0">
+                <a:latin typeface="Bahnschrift" panose="020B0502040204020203" pitchFamily="34" charset="0"/>
+              </a:rPr>
               <a:t>telefonszámot;</a:t>
             </a:r>
             <a:br>
-              <a:rPr lang="hu-HU" sz="1600" dirty="0"/>
-            </a:br>
-            <a:r>
-              <a:rPr lang="hu-HU" sz="1600" dirty="0"/>
+              <a:rPr lang="hu-HU" sz="1600" dirty="0">
+                <a:latin typeface="Bahnschrift" panose="020B0502040204020203" pitchFamily="34" charset="0"/>
+              </a:rPr>
+            </a:br>
+            <a:r>
+              <a:rPr lang="hu-HU" sz="1600" dirty="0">
+                <a:latin typeface="Bahnschrift" panose="020B0502040204020203" pitchFamily="34" charset="0"/>
+              </a:rPr>
               <a:t>pontos napi rutint;</a:t>
             </a:r>
             <a:br>
-              <a:rPr lang="hu-HU" sz="1600" dirty="0"/>
-            </a:br>
-            <a:r>
-              <a:rPr lang="hu-HU" sz="1600" dirty="0"/>
+              <a:rPr lang="hu-HU" sz="1600" dirty="0">
+                <a:latin typeface="Bahnschrift" panose="020B0502040204020203" pitchFamily="34" charset="0"/>
+              </a:rPr>
+            </a:br>
+            <a:r>
+              <a:rPr lang="hu-HU" sz="1600" dirty="0">
+                <a:latin typeface="Bahnschrift" panose="020B0502040204020203" pitchFamily="34" charset="0"/>
+              </a:rPr>
               <a:t>jelszavakat;</a:t>
             </a:r>
             <a:br>
-              <a:rPr lang="hu-HU" sz="1600" dirty="0"/>
-            </a:br>
-            <a:r>
-              <a:rPr lang="hu-HU" sz="1600" dirty="0"/>
+              <a:rPr lang="hu-HU" sz="1600" dirty="0">
+                <a:latin typeface="Bahnschrift" panose="020B0502040204020203" pitchFamily="34" charset="0"/>
+              </a:rPr>
+            </a:br>
+            <a:r>
+              <a:rPr lang="hu-HU" sz="1600" dirty="0">
+                <a:latin typeface="Bahnschrift" panose="020B0502040204020203" pitchFamily="34" charset="0"/>
+              </a:rPr>
               <a:t>aktuális tartózkodási helyet;</a:t>
             </a:r>
             <a:br>
-              <a:rPr lang="hu-HU" sz="1600" dirty="0"/>
-            </a:br>
-            <a:r>
-              <a:rPr lang="hu-HU" sz="1600" dirty="0"/>
+              <a:rPr lang="hu-HU" sz="1600" dirty="0">
+                <a:latin typeface="Bahnschrift" panose="020B0502040204020203" pitchFamily="34" charset="0"/>
+              </a:rPr>
+            </a:br>
+            <a:r>
+              <a:rPr lang="hu-HU" sz="1600" dirty="0">
+                <a:latin typeface="Bahnschrift" panose="020B0502040204020203" pitchFamily="34" charset="0"/>
+              </a:rPr>
               <a:t>személyes vagy érzékeny dokumentumokat.</a:t>
             </a:r>
             <a:br>
-              <a:rPr lang="hu-HU" sz="1600" dirty="0"/>
-            </a:br>
-            <a:r>
-              <a:rPr lang="hu-HU" sz="1600" dirty="0"/>
+              <a:rPr lang="hu-HU" sz="1600" dirty="0">
+                <a:latin typeface="Bahnschrift" panose="020B0502040204020203" pitchFamily="34" charset="0"/>
+              </a:rPr>
+            </a:br>
+            <a:r>
+              <a:rPr lang="hu-HU" sz="1600" dirty="0">
+                <a:latin typeface="Bahnschrift" panose="020B0502040204020203" pitchFamily="34" charset="0"/>
+              </a:rPr>
               <a:t>Másokról készült fényképet csak akkor tegyünk közzé, ha ehhez megfelelő engedélyünk van.</a:t>
             </a:r>
           </a:p>
@@ -5779,7 +5925,7 @@
           <a:p>
             <a:r>
               <a:rPr lang="hu-HU" sz="3600" dirty="0">
-                <a:latin typeface="Arial Black" panose="020B0A04020102020204" pitchFamily="34" charset="0"/>
+                <a:latin typeface="Arial Rounded MT Bold" panose="020F0704030504030204" pitchFamily="34" charset="0"/>
               </a:rPr>
               <a:t>Közösségi média</a:t>
             </a:r>
@@ -5839,69 +5985,107 @@
           <a:lstStyle/>
           <a:p>
             <a:r>
-              <a:rPr lang="hu-HU" sz="2000" dirty="0"/>
+              <a:rPr lang="hu-HU" sz="2000" dirty="0">
+                <a:latin typeface="Bahnschrift" panose="020B0502040204020203" pitchFamily="34" charset="0"/>
+              </a:rPr>
               <a:t>Online ismerősök</a:t>
             </a:r>
             <a:br>
-              <a:rPr lang="hu-HU" sz="2000" dirty="0"/>
-            </a:br>
-            <a:r>
-              <a:rPr lang="hu-HU" sz="2000" dirty="0"/>
+              <a:rPr lang="hu-HU" sz="2000" dirty="0">
+                <a:latin typeface="Bahnschrift" panose="020B0502040204020203" pitchFamily="34" charset="0"/>
+              </a:rPr>
+            </a:br>
+            <a:r>
+              <a:rPr lang="hu-HU" sz="2000" dirty="0">
+                <a:latin typeface="Bahnschrift" panose="020B0502040204020203" pitchFamily="34" charset="0"/>
+              </a:rPr>
               <a:t>Az interneten nem mindig tudjuk biztosan, hogy ki van a másik profil mögött. Ezért egy online megismert embernek ne adjunk meg személyes adatokat, és ne találkozzunk vele egyedül.</a:t>
             </a:r>
             <a:br>
-              <a:rPr lang="hu-HU" sz="2000" dirty="0"/>
-            </a:br>
-            <a:r>
-              <a:rPr lang="hu-HU" sz="2000" dirty="0"/>
+              <a:rPr lang="hu-HU" sz="2000" dirty="0">
+                <a:latin typeface="Bahnschrift" panose="020B0502040204020203" pitchFamily="34" charset="0"/>
+              </a:rPr>
+            </a:br>
+            <a:r>
+              <a:rPr lang="hu-HU" sz="2000" dirty="0">
+                <a:latin typeface="Bahnschrift" panose="020B0502040204020203" pitchFamily="34" charset="0"/>
+              </a:rPr>
               <a:t/>
             </a:r>
             <a:br>
-              <a:rPr lang="hu-HU" sz="2000" dirty="0"/>
-            </a:br>
-            <a:r>
-              <a:rPr lang="hu-HU" sz="2000" dirty="0"/>
+              <a:rPr lang="hu-HU" sz="2000" dirty="0">
+                <a:latin typeface="Bahnschrift" panose="020B0502040204020203" pitchFamily="34" charset="0"/>
+              </a:rPr>
+            </a:br>
+            <a:r>
+              <a:rPr lang="hu-HU" sz="2000" dirty="0">
+                <a:latin typeface="Bahnschrift" panose="020B0502040204020203" pitchFamily="34" charset="0"/>
+              </a:rPr>
               <a:t>Ha valaki fenyeget, zsarol, kellemetlen üzeneteket küld vagy személyes találkozóra próbál rávenni, szóljunk egy megbízható felnőttnek.</a:t>
             </a:r>
             <a:br>
-              <a:rPr lang="hu-HU" sz="2000" dirty="0"/>
-            </a:br>
-            <a:r>
-              <a:rPr lang="hu-HU" sz="2000" dirty="0"/>
+              <a:rPr lang="hu-HU" sz="2000" dirty="0">
+                <a:latin typeface="Bahnschrift" panose="020B0502040204020203" pitchFamily="34" charset="0"/>
+              </a:rPr>
+            </a:br>
+            <a:r>
+              <a:rPr lang="hu-HU" sz="2000" dirty="0">
+                <a:latin typeface="Bahnschrift" panose="020B0502040204020203" pitchFamily="34" charset="0"/>
+              </a:rPr>
               <a:t/>
             </a:r>
             <a:br>
-              <a:rPr lang="hu-HU" sz="2000" dirty="0"/>
-            </a:br>
-            <a:r>
-              <a:rPr lang="hu-HU" sz="2000" dirty="0"/>
+              <a:rPr lang="hu-HU" sz="2000" dirty="0">
+                <a:latin typeface="Bahnschrift" panose="020B0502040204020203" pitchFamily="34" charset="0"/>
+              </a:rPr>
+            </a:br>
+            <a:r>
+              <a:rPr lang="hu-HU" sz="2000" dirty="0">
+                <a:latin typeface="Bahnschrift" panose="020B0502040204020203" pitchFamily="34" charset="0"/>
+              </a:rPr>
               <a:t>Digitális lábnyom</a:t>
             </a:r>
             <a:br>
-              <a:rPr lang="hu-HU" sz="2000" dirty="0"/>
-            </a:br>
-            <a:r>
-              <a:rPr lang="hu-HU" sz="2000" dirty="0"/>
+              <a:rPr lang="hu-HU" sz="2000" dirty="0">
+                <a:latin typeface="Bahnschrift" panose="020B0502040204020203" pitchFamily="34" charset="0"/>
+              </a:rPr>
+            </a:br>
+            <a:r>
+              <a:rPr lang="hu-HU" sz="2000" dirty="0">
+                <a:latin typeface="Bahnschrift" panose="020B0502040204020203" pitchFamily="34" charset="0"/>
+              </a:rPr>
               <a:t>Az interneten közzétett tartalmak hosszú ideig elérhetők maradhatnak. Ezért minden poszt vagy fénykép előtt érdemes feltenni magunknak a kérdést:</a:t>
             </a:r>
             <a:br>
-              <a:rPr lang="hu-HU" sz="2000" dirty="0"/>
-            </a:br>
-            <a:r>
-              <a:rPr lang="hu-HU" sz="2000" dirty="0"/>
+              <a:rPr lang="hu-HU" sz="2000" dirty="0">
+                <a:latin typeface="Bahnschrift" panose="020B0502040204020203" pitchFamily="34" charset="0"/>
+              </a:rPr>
+            </a:br>
+            <a:r>
+              <a:rPr lang="hu-HU" sz="2000" dirty="0">
+                <a:latin typeface="Bahnschrift" panose="020B0502040204020203" pitchFamily="34" charset="0"/>
+              </a:rPr>
               <a:t/>
             </a:r>
             <a:br>
-              <a:rPr lang="hu-HU" sz="2000" dirty="0"/>
-            </a:br>
-            <a:r>
-              <a:rPr lang="hu-HU" sz="2000" dirty="0"/>
+              <a:rPr lang="hu-HU" sz="2000" dirty="0">
+                <a:latin typeface="Bahnschrift" panose="020B0502040204020203" pitchFamily="34" charset="0"/>
+              </a:rPr>
+            </a:br>
+            <a:r>
+              <a:rPr lang="hu-HU" sz="2000" dirty="0">
+                <a:latin typeface="Bahnschrift" panose="020B0502040204020203" pitchFamily="34" charset="0"/>
+              </a:rPr>
               <a:t>„Rendben lenne, ha ezt később egy tanárom, családtagom vagy leendő munkáltatóm is látná?”</a:t>
             </a:r>
             <a:br>
-              <a:rPr lang="hu-HU" sz="2000" dirty="0"/>
-            </a:br>
-            <a:endParaRPr lang="hu-HU" sz="2000" dirty="0"/>
+              <a:rPr lang="hu-HU" sz="2000" dirty="0">
+                <a:latin typeface="Bahnschrift" panose="020B0502040204020203" pitchFamily="34" charset="0"/>
+              </a:rPr>
+            </a:br>
+            <a:endParaRPr lang="hu-HU" sz="2000" dirty="0">
+              <a:latin typeface="Bahnschrift" panose="020B0502040204020203" pitchFamily="34" charset="0"/>
+            </a:endParaRPr>
           </a:p>
         </p:txBody>
       </p:sp>
@@ -5958,99 +6142,153 @@
           <a:lstStyle/>
           <a:p>
             <a:r>
-              <a:rPr lang="hu-HU" sz="1800" dirty="0"/>
+              <a:rPr lang="hu-HU" sz="1800" dirty="0">
+                <a:latin typeface="Bahnschrift" panose="020B0502040204020203" pitchFamily="34" charset="0"/>
+              </a:rPr>
               <a:t>Ne ess pánikba!</a:t>
             </a:r>
             <a:br>
-              <a:rPr lang="hu-HU" sz="1800" dirty="0"/>
-            </a:br>
-            <a:r>
-              <a:rPr lang="hu-HU" sz="1800" dirty="0"/>
+              <a:rPr lang="hu-HU" sz="1800" dirty="0">
+                <a:latin typeface="Bahnschrift" panose="020B0502040204020203" pitchFamily="34" charset="0"/>
+              </a:rPr>
+            </a:br>
+            <a:r>
+              <a:rPr lang="hu-HU" sz="1800" dirty="0">
+                <a:latin typeface="Bahnschrift" panose="020B0502040204020203" pitchFamily="34" charset="0"/>
+              </a:rPr>
               <a:t>Bárkivel megtörténhet, hogy rossz linkre kattint, csaló üzenetre válaszol, elveszíti a telefonját vagy feltörik valamelyik fiókját. A legfontosabb, hogy ne próbáljuk eltitkolni a problémát.</a:t>
             </a:r>
             <a:br>
-              <a:rPr lang="hu-HU" sz="1800" dirty="0"/>
-            </a:br>
-            <a:r>
-              <a:rPr lang="hu-HU" sz="1800" dirty="0"/>
+              <a:rPr lang="hu-HU" sz="1800" dirty="0">
+                <a:latin typeface="Bahnschrift" panose="020B0502040204020203" pitchFamily="34" charset="0"/>
+              </a:rPr>
+            </a:br>
+            <a:r>
+              <a:rPr lang="hu-HU" sz="1800" dirty="0">
+                <a:latin typeface="Bahnschrift" panose="020B0502040204020203" pitchFamily="34" charset="0"/>
+              </a:rPr>
               <a:t/>
             </a:r>
             <a:br>
-              <a:rPr lang="hu-HU" sz="1800" dirty="0"/>
-            </a:br>
-            <a:r>
-              <a:rPr lang="hu-HU" sz="1800" dirty="0"/>
+              <a:rPr lang="hu-HU" sz="1800" dirty="0">
+                <a:latin typeface="Bahnschrift" panose="020B0502040204020203" pitchFamily="34" charset="0"/>
+              </a:rPr>
+            </a:br>
+            <a:r>
+              <a:rPr lang="hu-HU" sz="1800" dirty="0">
+                <a:latin typeface="Bahnschrift" panose="020B0502040204020203" pitchFamily="34" charset="0"/>
+              </a:rPr>
               <a:t>Ha gyanús linkre kattintottam</a:t>
             </a:r>
             <a:br>
-              <a:rPr lang="hu-HU" sz="1800" dirty="0"/>
-            </a:br>
-            <a:r>
-              <a:rPr lang="hu-HU" sz="1800" dirty="0"/>
+              <a:rPr lang="hu-HU" sz="1800" dirty="0">
+                <a:latin typeface="Bahnschrift" panose="020B0502040204020203" pitchFamily="34" charset="0"/>
+              </a:rPr>
+            </a:br>
+            <a:r>
+              <a:rPr lang="hu-HU" sz="1800" dirty="0">
+                <a:latin typeface="Bahnschrift" panose="020B0502040204020203" pitchFamily="34" charset="0"/>
+              </a:rPr>
               <a:t>Ne adjunk meg további adatokat, és ne </a:t>
             </a:r>
             <a:r>
-              <a:rPr lang="hu-HU" sz="1800" dirty="0" err="1"/>
+              <a:rPr lang="hu-HU" sz="1800" dirty="0" err="1">
+                <a:latin typeface="Bahnschrift" panose="020B0502040204020203" pitchFamily="34" charset="0"/>
+              </a:rPr>
               <a:t>töltsünk</a:t>
             </a:r>
             <a:r>
-              <a:rPr lang="hu-HU" sz="1800" dirty="0"/>
+              <a:rPr lang="hu-HU" sz="1800" dirty="0">
+                <a:latin typeface="Bahnschrift" panose="020B0502040204020203" pitchFamily="34" charset="0"/>
+              </a:rPr>
               <a:t> le ismeretlen fájlokat. Ha megadtunk egy jelszót, azonnal változtassuk meg egy biztonságos eszközről. Ha több helyen is ugyanazt a jelszót használtuk, ott is cseréljük le.</a:t>
             </a:r>
             <a:br>
-              <a:rPr lang="hu-HU" sz="1800" dirty="0"/>
-            </a:br>
-            <a:r>
-              <a:rPr lang="hu-HU" sz="1800" dirty="0"/>
+              <a:rPr lang="hu-HU" sz="1800" dirty="0">
+                <a:latin typeface="Bahnschrift" panose="020B0502040204020203" pitchFamily="34" charset="0"/>
+              </a:rPr>
+            </a:br>
+            <a:r>
+              <a:rPr lang="hu-HU" sz="1800" dirty="0">
+                <a:latin typeface="Bahnschrift" panose="020B0502040204020203" pitchFamily="34" charset="0"/>
+              </a:rPr>
               <a:t/>
             </a:r>
             <a:br>
-              <a:rPr lang="hu-HU" sz="1800" dirty="0"/>
-            </a:br>
-            <a:r>
-              <a:rPr lang="hu-HU" sz="1800" dirty="0"/>
+              <a:rPr lang="hu-HU" sz="1800" dirty="0">
+                <a:latin typeface="Bahnschrift" panose="020B0502040204020203" pitchFamily="34" charset="0"/>
+              </a:rPr>
+            </a:br>
+            <a:r>
+              <a:rPr lang="hu-HU" sz="1800" dirty="0">
+                <a:latin typeface="Bahnschrift" panose="020B0502040204020203" pitchFamily="34" charset="0"/>
+              </a:rPr>
               <a:t>Ha feltörték a fiókomat</a:t>
             </a:r>
             <a:br>
-              <a:rPr lang="hu-HU" sz="1800" dirty="0"/>
-            </a:br>
-            <a:r>
-              <a:rPr lang="hu-HU" sz="1800" dirty="0"/>
+              <a:rPr lang="hu-HU" sz="1800" dirty="0">
+                <a:latin typeface="Bahnschrift" panose="020B0502040204020203" pitchFamily="34" charset="0"/>
+              </a:rPr>
+            </a:br>
+            <a:r>
+              <a:rPr lang="hu-HU" sz="1800" dirty="0">
+                <a:latin typeface="Bahnschrift" panose="020B0502040204020203" pitchFamily="34" charset="0"/>
+              </a:rPr>
               <a:t>Változtassuk meg a jelszót, kapcsoljuk be a többfaktoros hitelesítést, és ellenőrizzük, hogy nem módosították-e a fiók biztonsági beállításait.</a:t>
             </a:r>
             <a:br>
-              <a:rPr lang="hu-HU" sz="1800" dirty="0"/>
-            </a:br>
-            <a:r>
-              <a:rPr lang="hu-HU" sz="1800" dirty="0"/>
+              <a:rPr lang="hu-HU" sz="1800" dirty="0">
+                <a:latin typeface="Bahnschrift" panose="020B0502040204020203" pitchFamily="34" charset="0"/>
+              </a:rPr>
+            </a:br>
+            <a:r>
+              <a:rPr lang="hu-HU" sz="1800" dirty="0">
+                <a:latin typeface="Bahnschrift" panose="020B0502040204020203" pitchFamily="34" charset="0"/>
+              </a:rPr>
               <a:t/>
             </a:r>
             <a:br>
-              <a:rPr lang="hu-HU" sz="1800" dirty="0"/>
-            </a:br>
-            <a:r>
-              <a:rPr lang="hu-HU" sz="1800" dirty="0"/>
+              <a:rPr lang="hu-HU" sz="1800" dirty="0">
+                <a:latin typeface="Bahnschrift" panose="020B0502040204020203" pitchFamily="34" charset="0"/>
+              </a:rPr>
+            </a:br>
+            <a:r>
+              <a:rPr lang="hu-HU" sz="1800" dirty="0">
+                <a:latin typeface="Bahnschrift" panose="020B0502040204020203" pitchFamily="34" charset="0"/>
+              </a:rPr>
               <a:t>Ha már nem tudunk belépni, használjuk a szolgáltató hivatalos fiók-helyreállítási lehetőségeit.</a:t>
             </a:r>
             <a:br>
-              <a:rPr lang="hu-HU" sz="1800" dirty="0"/>
-            </a:br>
-            <a:r>
-              <a:rPr lang="hu-HU" sz="1800" dirty="0"/>
+              <a:rPr lang="hu-HU" sz="1800" dirty="0">
+                <a:latin typeface="Bahnschrift" panose="020B0502040204020203" pitchFamily="34" charset="0"/>
+              </a:rPr>
+            </a:br>
+            <a:r>
+              <a:rPr lang="hu-HU" sz="1800" dirty="0">
+                <a:latin typeface="Bahnschrift" panose="020B0502040204020203" pitchFamily="34" charset="0"/>
+              </a:rPr>
               <a:t/>
             </a:r>
             <a:br>
-              <a:rPr lang="hu-HU" sz="1800" dirty="0"/>
-            </a:br>
-            <a:r>
-              <a:rPr lang="hu-HU" sz="1800" dirty="0"/>
+              <a:rPr lang="hu-HU" sz="1800" dirty="0">
+                <a:latin typeface="Bahnschrift" panose="020B0502040204020203" pitchFamily="34" charset="0"/>
+              </a:rPr>
+            </a:br>
+            <a:r>
+              <a:rPr lang="hu-HU" sz="1800" dirty="0">
+                <a:latin typeface="Bahnschrift" panose="020B0502040204020203" pitchFamily="34" charset="0"/>
+              </a:rPr>
               <a:t>Ha pénzügyi adatokat adtam meg</a:t>
             </a:r>
             <a:br>
-              <a:rPr lang="hu-HU" sz="1800" dirty="0"/>
-            </a:br>
-            <a:r>
-              <a:rPr lang="hu-HU" sz="1800" dirty="0"/>
+              <a:rPr lang="hu-HU" sz="1800" dirty="0">
+                <a:latin typeface="Bahnschrift" panose="020B0502040204020203" pitchFamily="34" charset="0"/>
+              </a:rPr>
+            </a:br>
+            <a:r>
+              <a:rPr lang="hu-HU" sz="1800" dirty="0">
+                <a:latin typeface="Bahnschrift" panose="020B0502040204020203" pitchFamily="34" charset="0"/>
+              </a:rPr>
               <a:t>Minél hamarabb értesítsük a bankot vagy az érintett pénzügyi szolgáltatót a hivatalos elérhetőségén keresztül. Figyeljük a számlánkat, és szükség esetén kérjünk segítséget.</a:t>
             </a:r>
           </a:p>
@@ -6080,7 +6318,7 @@
           <a:p>
             <a:r>
               <a:rPr lang="hu-HU" sz="3600" dirty="0">
-                <a:latin typeface="Arial Black" panose="020B0A04020102020204" pitchFamily="34" charset="0"/>
+                <a:latin typeface="Arial Rounded MT Bold" panose="020F0704030504030204" pitchFamily="34" charset="0"/>
               </a:rPr>
               <a:t>Mit tegyek, ha baj történt?</a:t>
             </a:r>
@@ -6140,70 +6378,108 @@
           <a:lstStyle/>
           <a:p>
             <a:r>
-              <a:rPr lang="hu-HU" sz="2000" dirty="0"/>
+              <a:rPr lang="hu-HU" sz="2000" dirty="0">
+                <a:latin typeface="Bahnschrift" panose="020B0502040204020203" pitchFamily="34" charset="0"/>
+              </a:rPr>
               <a:t>Ha zaklatnak vagy zsarolnak</a:t>
             </a:r>
             <a:br>
-              <a:rPr lang="hu-HU" sz="2000" dirty="0"/>
-            </a:br>
-            <a:r>
-              <a:rPr lang="hu-HU" sz="2000" dirty="0"/>
+              <a:rPr lang="hu-HU" sz="2000" dirty="0">
+                <a:latin typeface="Bahnschrift" panose="020B0502040204020203" pitchFamily="34" charset="0"/>
+              </a:rPr>
+            </a:br>
+            <a:r>
+              <a:rPr lang="hu-HU" sz="2000" dirty="0">
+                <a:latin typeface="Bahnschrift" panose="020B0502040204020203" pitchFamily="34" charset="0"/>
+              </a:rPr>
               <a:t>Ne válaszoljunk a zaklatónak, és ne küldjünk további személyes adatokat vagy pénzt. Mentsük el a bizonyítékokat, például képernyőképeket és üzeneteket. Ezután szóljunk egy megbízható felnőttnek, szükség esetén pedig kérjünk segítséget az illetékes hatóságoktól.</a:t>
             </a:r>
             <a:br>
-              <a:rPr lang="hu-HU" sz="2000" dirty="0"/>
-            </a:br>
-            <a:r>
-              <a:rPr lang="hu-HU" sz="2000" dirty="0"/>
+              <a:rPr lang="hu-HU" sz="2000" dirty="0">
+                <a:latin typeface="Bahnschrift" panose="020B0502040204020203" pitchFamily="34" charset="0"/>
+              </a:rPr>
+            </a:br>
+            <a:r>
+              <a:rPr lang="hu-HU" sz="2000" dirty="0">
+                <a:latin typeface="Bahnschrift" panose="020B0502040204020203" pitchFamily="34" charset="0"/>
+              </a:rPr>
               <a:t/>
             </a:r>
             <a:br>
-              <a:rPr lang="hu-HU" sz="2000" dirty="0"/>
-            </a:br>
-            <a:r>
-              <a:rPr lang="hu-HU" sz="2000" dirty="0"/>
+              <a:rPr lang="hu-HU" sz="2000" dirty="0">
+                <a:latin typeface="Bahnschrift" panose="020B0502040204020203" pitchFamily="34" charset="0"/>
+              </a:rPr>
+            </a:br>
+            <a:r>
+              <a:rPr lang="hu-HU" sz="2000" dirty="0">
+                <a:latin typeface="Bahnschrift" panose="020B0502040204020203" pitchFamily="34" charset="0"/>
+              </a:rPr>
               <a:t>Ha valaki más került bajba</a:t>
             </a:r>
             <a:br>
-              <a:rPr lang="hu-HU" sz="2000" dirty="0"/>
-            </a:br>
-            <a:r>
-              <a:rPr lang="hu-HU" sz="2000" dirty="0"/>
+              <a:rPr lang="hu-HU" sz="2000" dirty="0">
+                <a:latin typeface="Bahnschrift" panose="020B0502040204020203" pitchFamily="34" charset="0"/>
+              </a:rPr>
+            </a:br>
+            <a:r>
+              <a:rPr lang="hu-HU" sz="2000" dirty="0">
+                <a:latin typeface="Bahnschrift" panose="020B0502040204020203" pitchFamily="34" charset="0"/>
+              </a:rPr>
               <a:t>Ne hibáztassuk és ne nevessük ki. Hallgassuk meg, segítsünk neki, és ha szükséges, vonjunk be egy megbízható felnőttet vagy szakembert.</a:t>
             </a:r>
             <a:br>
-              <a:rPr lang="hu-HU" sz="2000" dirty="0"/>
-            </a:br>
-            <a:r>
-              <a:rPr lang="hu-HU" sz="2000" dirty="0"/>
+              <a:rPr lang="hu-HU" sz="2000" dirty="0">
+                <a:latin typeface="Bahnschrift" panose="020B0502040204020203" pitchFamily="34" charset="0"/>
+              </a:rPr>
+            </a:br>
+            <a:r>
+              <a:rPr lang="hu-HU" sz="2000" dirty="0">
+                <a:latin typeface="Bahnschrift" panose="020B0502040204020203" pitchFamily="34" charset="0"/>
+              </a:rPr>
               <a:t/>
             </a:r>
             <a:br>
-              <a:rPr lang="hu-HU" sz="2000" dirty="0"/>
-            </a:br>
-            <a:r>
-              <a:rPr lang="hu-HU" sz="2000" dirty="0"/>
+              <a:rPr lang="hu-HU" sz="2000" dirty="0">
+                <a:latin typeface="Bahnschrift" panose="020B0502040204020203" pitchFamily="34" charset="0"/>
+              </a:rPr>
+            </a:br>
+            <a:r>
+              <a:rPr lang="hu-HU" sz="2000" dirty="0">
+                <a:latin typeface="Bahnschrift" panose="020B0502040204020203" pitchFamily="34" charset="0"/>
+              </a:rPr>
               <a:t>A Kovács család szabálya</a:t>
             </a:r>
             <a:br>
-              <a:rPr lang="hu-HU" sz="2000" dirty="0"/>
-            </a:br>
-            <a:r>
-              <a:rPr lang="hu-HU" sz="2000" dirty="0"/>
+              <a:rPr lang="hu-HU" sz="2000" dirty="0">
+                <a:latin typeface="Bahnschrift" panose="020B0502040204020203" pitchFamily="34" charset="0"/>
+              </a:rPr>
+            </a:br>
+            <a:r>
+              <a:rPr lang="hu-HU" sz="2000" dirty="0">
+                <a:latin typeface="Bahnschrift" panose="020B0502040204020203" pitchFamily="34" charset="0"/>
+              </a:rPr>
               <a:t>Állj meg! Ne titkold el! Kérj segítséget!</a:t>
             </a:r>
             <a:br>
-              <a:rPr lang="hu-HU" sz="2000" dirty="0"/>
-            </a:br>
-            <a:r>
-              <a:rPr lang="hu-HU" sz="2000" dirty="0"/>
+              <a:rPr lang="hu-HU" sz="2000" dirty="0">
+                <a:latin typeface="Bahnschrift" panose="020B0502040204020203" pitchFamily="34" charset="0"/>
+              </a:rPr>
+            </a:br>
+            <a:r>
+              <a:rPr lang="hu-HU" sz="2000" dirty="0">
+                <a:latin typeface="Bahnschrift" panose="020B0502040204020203" pitchFamily="34" charset="0"/>
+              </a:rPr>
               <a:t/>
             </a:r>
             <a:br>
-              <a:rPr lang="hu-HU" sz="2000" dirty="0"/>
-            </a:br>
-            <a:r>
-              <a:rPr lang="hu-HU" sz="2000" dirty="0"/>
+              <a:rPr lang="hu-HU" sz="2000" dirty="0">
+                <a:latin typeface="Bahnschrift" panose="020B0502040204020203" pitchFamily="34" charset="0"/>
+              </a:rPr>
+            </a:br>
+            <a:r>
+              <a:rPr lang="hu-HU" sz="2000" dirty="0">
+                <a:latin typeface="Bahnschrift" panose="020B0502040204020203" pitchFamily="34" charset="0"/>
+              </a:rPr>
               <a:t>Az internetbiztonság közös felelősség. A tudatosság, az önfegyelem és az egymás iránti segítség sok veszélyes helyzet megelőzésében segíthet.</a:t>
             </a:r>
           </a:p>
@@ -6213,6 +6489,70 @@
     <p:extLst>
       <p:ext uri="{BB962C8B-B14F-4D97-AF65-F5344CB8AC3E}">
         <p14:creationId xmlns:p14="http://schemas.microsoft.com/office/powerpoint/2010/main" val="116785768"/>
+      </p:ext>
+    </p:extLst>
+  </p:cSld>
+  <p:clrMapOvr>
+    <a:masterClrMapping/>
+  </p:clrMapOvr>
+</p:sld>
+</file>
+
+<file path=ppt/slides/slide15.xml><?xml version="1.0" encoding="utf-8"?>
+<p:sld xmlns:a="http://schemas.openxmlformats.org/drawingml/2006/main" xmlns:r="http://schemas.openxmlformats.org/officeDocument/2006/relationships" xmlns:p="http://schemas.openxmlformats.org/presentationml/2006/main">
+  <p:cSld>
+    <p:spTree>
+      <p:nvGrpSpPr>
+        <p:cNvPr id="1" name=""/>
+        <p:cNvGrpSpPr/>
+        <p:nvPr/>
+      </p:nvGrpSpPr>
+      <p:grpSpPr>
+        <a:xfrm>
+          <a:off x="0" y="0"/>
+          <a:ext cx="0" cy="0"/>
+          <a:chOff x="0" y="0"/>
+          <a:chExt cx="0" cy="0"/>
+        </a:xfrm>
+      </p:grpSpPr>
+      <p:sp>
+        <p:nvSpPr>
+          <p:cNvPr id="3" name="Tartalom helye 2"/>
+          <p:cNvSpPr>
+            <a:spLocks noGrp="1"/>
+          </p:cNvSpPr>
+          <p:nvPr>
+            <p:ph idx="1"/>
+          </p:nvPr>
+        </p:nvSpPr>
+        <p:spPr>
+          <a:xfrm>
+            <a:off x="1178198" y="0"/>
+            <a:ext cx="9931236" cy="3615267"/>
+          </a:xfrm>
+        </p:spPr>
+        <p:txBody>
+          <a:bodyPr>
+            <a:normAutofit/>
+          </a:bodyPr>
+          <a:lstStyle/>
+          <a:p>
+            <a:r>
+              <a:rPr lang="hu-HU" sz="6000" dirty="0" smtClean="0">
+                <a:latin typeface="Arial Rounded MT Bold" panose="020F0704030504030204" pitchFamily="34" charset="0"/>
+              </a:rPr>
+              <a:t>Köszönjük a figyelmet</a:t>
+            </a:r>
+            <a:endParaRPr lang="hu-HU" sz="6000" dirty="0">
+              <a:latin typeface="Arial Rounded MT Bold" panose="020F0704030504030204" pitchFamily="34" charset="0"/>
+            </a:endParaRPr>
+          </a:p>
+        </p:txBody>
+      </p:sp>
+    </p:spTree>
+    <p:extLst>
+      <p:ext uri="{BB962C8B-B14F-4D97-AF65-F5344CB8AC3E}">
+        <p14:creationId xmlns:p14="http://schemas.microsoft.com/office/powerpoint/2010/main" val="3055738662"/>
       </p:ext>
     </p:extLst>
   </p:cSld>
@@ -6251,7 +6591,7 @@
         </p:nvSpPr>
         <p:spPr>
           <a:xfrm>
-            <a:off x="347327" y="835972"/>
+            <a:off x="126610" y="945439"/>
             <a:ext cx="9293977" cy="4276111"/>
           </a:xfrm>
         </p:spPr>
@@ -6262,9 +6602,14 @@
           <a:lstStyle/>
           <a:p>
             <a:r>
-              <a:rPr lang="hu-HU" sz="2400" dirty="0"/>
+              <a:rPr lang="hu-HU" sz="2400" dirty="0">
+                <a:latin typeface="Bahnschrift" panose="020B0502040204020203" pitchFamily="34" charset="0"/>
+              </a:rPr>
               <a:t>Az internet a mindennapi életünk fontos része. Tanulásra, kapcsolattartásra, vásárlásra, szórakozásra és információszerzésre használjuk. Ugyanakkor az online világ veszélyeket is rejt, ezért fontos, hogy minden családtag tudatosan és felelősen használja a digitális eszközöket.</a:t>
             </a:r>
+            <a:endParaRPr lang="hu-HU" sz="2400" dirty="0">
+              <a:latin typeface="Bahnschrift" panose="020B0502040204020203" pitchFamily="34" charset="0"/>
+            </a:endParaRPr>
           </a:p>
         </p:txBody>
       </p:sp>
@@ -6280,7 +6625,7 @@
         </p:nvSpPr>
         <p:spPr>
           <a:xfrm>
-            <a:off x="0" y="256674"/>
+            <a:off x="0" y="0"/>
             <a:ext cx="8320254" cy="1461614"/>
           </a:xfrm>
         </p:spPr>
@@ -6291,8 +6636,14 @@
           <a:lstStyle/>
           <a:p>
             <a:r>
+              <a:rPr lang="hu-HU" sz="3600" b="1" dirty="0">
+                <a:latin typeface="Arial Rounded MT Bold" panose="020F0704030504030204" pitchFamily="34" charset="0"/>
+              </a:rPr>
+              <a:t>Biztonságos</a:t>
+            </a:r>
+            <a:r>
               <a:rPr lang="hu-HU" sz="3600" b="1" dirty="0"/>
-              <a:t>Biztonságos család az interneten</a:t>
+              <a:t> család az interneten</a:t>
             </a:r>
             <a:endParaRPr lang="hu-HU" sz="3600" dirty="0"/>
           </a:p>
@@ -6340,7 +6691,7 @@
         </p:nvSpPr>
         <p:spPr>
           <a:xfrm>
-            <a:off x="0" y="1477656"/>
+            <a:off x="-72194" y="1169877"/>
             <a:ext cx="3449053" cy="4229768"/>
           </a:xfrm>
         </p:spPr>
@@ -6351,47 +6702,79 @@
           <a:lstStyle/>
           <a:p>
             <a:r>
-              <a:rPr lang="hu-HU" sz="2000" b="1" dirty="0"/>
+              <a:rPr lang="hu-HU" sz="2000" b="1" dirty="0">
+                <a:latin typeface="Bahnschrift" panose="020B0502040204020203" pitchFamily="34" charset="0"/>
+                <a:cs typeface="Times New Roman" panose="02020603050405020304" pitchFamily="18" charset="0"/>
+              </a:rPr>
               <a:t>Anna</a:t>
             </a:r>
             <a:r>
-              <a:rPr lang="hu-HU" sz="2000" dirty="0"/>
+              <a:rPr lang="hu-HU" sz="2000" dirty="0">
+                <a:latin typeface="Bahnschrift" panose="020B0502040204020203" pitchFamily="34" charset="0"/>
+                <a:cs typeface="Times New Roman" panose="02020603050405020304" pitchFamily="18" charset="0"/>
+              </a:rPr>
               <a:t> – 12 éves tanuló</a:t>
             </a:r>
             <a:br>
-              <a:rPr lang="hu-HU" sz="2000" dirty="0"/>
-            </a:br>
-            <a:r>
-              <a:rPr lang="hu-HU" sz="2000" b="1" dirty="0"/>
+              <a:rPr lang="hu-HU" sz="2000" dirty="0">
+                <a:latin typeface="Bahnschrift" panose="020B0502040204020203" pitchFamily="34" charset="0"/>
+                <a:cs typeface="Times New Roman" panose="02020603050405020304" pitchFamily="18" charset="0"/>
+              </a:rPr>
+            </a:br>
+            <a:r>
+              <a:rPr lang="hu-HU" sz="2000" b="1" dirty="0">
+                <a:latin typeface="Bahnschrift" panose="020B0502040204020203" pitchFamily="34" charset="0"/>
+                <a:cs typeface="Times New Roman" panose="02020603050405020304" pitchFamily="18" charset="0"/>
+              </a:rPr>
               <a:t>Digitális eszköz: </a:t>
             </a:r>
             <a:r>
-              <a:rPr lang="hu-HU" sz="2000" dirty="0"/>
+              <a:rPr lang="hu-HU" sz="2000" dirty="0">
+                <a:latin typeface="Bahnschrift" panose="020B0502040204020203" pitchFamily="34" charset="0"/>
+                <a:cs typeface="Times New Roman" panose="02020603050405020304" pitchFamily="18" charset="0"/>
+              </a:rPr>
               <a:t>okostelefon</a:t>
             </a:r>
             <a:br>
-              <a:rPr lang="hu-HU" sz="2000" dirty="0"/>
-            </a:br>
-            <a:r>
-              <a:rPr lang="hu-HU" sz="2000" b="1" dirty="0"/>
+              <a:rPr lang="hu-HU" sz="2000" dirty="0">
+                <a:latin typeface="Bahnschrift" panose="020B0502040204020203" pitchFamily="34" charset="0"/>
+                <a:cs typeface="Times New Roman" panose="02020603050405020304" pitchFamily="18" charset="0"/>
+              </a:rPr>
+            </a:br>
+            <a:r>
+              <a:rPr lang="hu-HU" sz="2000" b="1" dirty="0">
+                <a:latin typeface="Bahnschrift" panose="020B0502040204020203" pitchFamily="34" charset="0"/>
+                <a:cs typeface="Times New Roman" panose="02020603050405020304" pitchFamily="18" charset="0"/>
+              </a:rPr>
               <a:t>Online tevékenység: </a:t>
             </a:r>
             <a:r>
-              <a:rPr lang="hu-HU" sz="2000" dirty="0"/>
+              <a:rPr lang="hu-HU" sz="2000" dirty="0">
+                <a:latin typeface="Bahnschrift" panose="020B0502040204020203" pitchFamily="34" charset="0"/>
+                <a:cs typeface="Times New Roman" panose="02020603050405020304" pitchFamily="18" charset="0"/>
+              </a:rPr>
               <a:t>közösségi média</a:t>
             </a:r>
             <a:br>
-              <a:rPr lang="hu-HU" sz="2000" dirty="0"/>
-            </a:br>
-            <a:r>
-              <a:rPr lang="hu-HU" sz="2000" b="1" dirty="0"/>
+              <a:rPr lang="hu-HU" sz="2000" dirty="0">
+                <a:latin typeface="Bahnschrift" panose="020B0502040204020203" pitchFamily="34" charset="0"/>
+                <a:cs typeface="Times New Roman" panose="02020603050405020304" pitchFamily="18" charset="0"/>
+              </a:rPr>
+            </a:br>
+            <a:r>
+              <a:rPr lang="hu-HU" sz="2000" b="1" dirty="0">
+                <a:latin typeface="Bahnschrift" panose="020B0502040204020203" pitchFamily="34" charset="0"/>
+                <a:cs typeface="Times New Roman" panose="02020603050405020304" pitchFamily="18" charset="0"/>
+              </a:rPr>
               <a:t>Biztonsági probléma: </a:t>
             </a:r>
             <a:r>
-              <a:rPr lang="hu-HU" sz="2000" dirty="0"/>
+              <a:rPr lang="hu-HU" sz="2000" dirty="0">
+                <a:latin typeface="Bahnschrift" panose="020B0502040204020203" pitchFamily="34" charset="0"/>
+                <a:cs typeface="Times New Roman" panose="02020603050405020304" pitchFamily="18" charset="0"/>
+              </a:rPr>
               <a:t>túl sok személyes információt oszt meg, például a lakhelyét, iskoláját és fényképeket.</a:t>
             </a:r>
-            <a:endParaRPr lang="hu-HU" sz="2000" dirty="0"/>
           </a:p>
         </p:txBody>
       </p:sp>
@@ -6418,10 +6801,14 @@
           <a:lstStyle/>
           <a:p>
             <a:r>
-              <a:rPr lang="hu-HU" sz="3600" b="1" dirty="0"/>
+              <a:rPr lang="hu-HU" sz="3600" b="1" dirty="0">
+                <a:latin typeface="Arial Rounded MT Bold" panose="020F0704030504030204" pitchFamily="34" charset="0"/>
+              </a:rPr>
               <a:t>A Kovács család tagjai</a:t>
             </a:r>
-            <a:endParaRPr lang="hu-HU" sz="5400" dirty="0"/>
+            <a:endParaRPr lang="hu-HU" sz="5400" dirty="0">
+              <a:latin typeface="Arial Rounded MT Bold" panose="020F0704030504030204" pitchFamily="34" charset="0"/>
+            </a:endParaRPr>
           </a:p>
         </p:txBody>
       </p:sp>
@@ -6433,7 +6820,7 @@
         </p:nvSpPr>
         <p:spPr>
           <a:xfrm>
-            <a:off x="3593429" y="1853602"/>
+            <a:off x="3376859" y="1545824"/>
             <a:ext cx="3304674" cy="3477875"/>
           </a:xfrm>
           <a:prstGeom prst="rect">
@@ -6448,41 +6835,57 @@
           <a:lstStyle/>
           <a:p>
             <a:r>
-              <a:rPr lang="hu-HU" sz="2000" b="1" dirty="0"/>
+              <a:rPr lang="hu-HU" sz="2000" b="1" dirty="0">
+                <a:latin typeface="Bahnschrift" panose="020B0502040204020203" pitchFamily="34" charset="0"/>
+              </a:rPr>
               <a:t>Bence</a:t>
             </a:r>
             <a:r>
-              <a:rPr lang="hu-HU" sz="2000" dirty="0"/>
+              <a:rPr lang="hu-HU" sz="2000" dirty="0">
+                <a:latin typeface="Bahnschrift" panose="020B0502040204020203" pitchFamily="34" charset="0"/>
+              </a:rPr>
               <a:t> – 17 éves diák</a:t>
             </a:r>
           </a:p>
           <a:p>
             <a:r>
-              <a:rPr lang="hu-HU" sz="2000" b="1" dirty="0"/>
+              <a:rPr lang="hu-HU" sz="2000" b="1" dirty="0">
+                <a:latin typeface="Bahnschrift" panose="020B0502040204020203" pitchFamily="34" charset="0"/>
+              </a:rPr>
               <a:t>Digitális eszköz: </a:t>
             </a:r>
             <a:r>
-              <a:rPr lang="hu-HU" sz="2000" dirty="0"/>
+              <a:rPr lang="hu-HU" sz="2000" dirty="0">
+                <a:latin typeface="Bahnschrift" panose="020B0502040204020203" pitchFamily="34" charset="0"/>
+              </a:rPr>
               <a:t>laptop</a:t>
             </a:r>
           </a:p>
           <a:p>
             <a:r>
-              <a:rPr lang="hu-HU" sz="2000" b="1" dirty="0"/>
+              <a:rPr lang="hu-HU" sz="2000" b="1" dirty="0">
+                <a:latin typeface="Bahnschrift" panose="020B0502040204020203" pitchFamily="34" charset="0"/>
+              </a:rPr>
               <a:t>Online tevékenység: </a:t>
             </a:r>
             <a:r>
-              <a:rPr lang="hu-HU" sz="2000" dirty="0"/>
+              <a:rPr lang="hu-HU" sz="2000" dirty="0">
+                <a:latin typeface="Bahnschrift" panose="020B0502040204020203" pitchFamily="34" charset="0"/>
+              </a:rPr>
               <a:t>videojátékok és online kommunikáció</a:t>
             </a:r>
           </a:p>
           <a:p>
             <a:r>
-              <a:rPr lang="hu-HU" sz="2000" b="1" dirty="0"/>
+              <a:rPr lang="hu-HU" sz="2000" b="1" dirty="0">
+                <a:latin typeface="Bahnschrift" panose="020B0502040204020203" pitchFamily="34" charset="0"/>
+              </a:rPr>
               <a:t>Biztonsági probléma: </a:t>
             </a:r>
             <a:r>
-              <a:rPr lang="hu-HU" sz="2000" dirty="0"/>
+              <a:rPr lang="hu-HU" sz="2000" dirty="0">
+                <a:latin typeface="Bahnschrift" panose="020B0502040204020203" pitchFamily="34" charset="0"/>
+              </a:rPr>
               <a:t>ismeretlen játékosokkal beszélget, és néha ugyanazt a jelszót használja több szolgáltatásban.</a:t>
             </a:r>
           </a:p>
@@ -6496,8 +6899,8 @@
         </p:nvSpPr>
         <p:spPr>
           <a:xfrm>
-            <a:off x="6681533" y="1393718"/>
-            <a:ext cx="2951751" cy="5210323"/>
+            <a:off x="6573248" y="1477656"/>
+            <a:ext cx="2951751" cy="4401205"/>
           </a:xfrm>
           <a:prstGeom prst="rect">
             <a:avLst/>
@@ -6511,54 +6914,78 @@
           <a:lstStyle/>
           <a:p>
             <a:r>
-              <a:rPr lang="hu-HU" sz="2000" b="1" dirty="0"/>
+              <a:rPr lang="hu-HU" sz="2000" b="1" dirty="0">
+                <a:latin typeface="Bahnschrift" panose="020B0502040204020203" pitchFamily="34" charset="0"/>
+              </a:rPr>
               <a:t>Éva </a:t>
             </a:r>
             <a:r>
-              <a:rPr lang="hu-HU" sz="2000" dirty="0"/>
+              <a:rPr lang="hu-HU" sz="2000" dirty="0">
+                <a:latin typeface="Bahnschrift" panose="020B0502040204020203" pitchFamily="34" charset="0"/>
+              </a:rPr>
               <a:t>– 42 éves édesanya</a:t>
             </a:r>
           </a:p>
           <a:p>
             <a:r>
-              <a:rPr lang="hu-HU" sz="2000" b="1" dirty="0"/>
+              <a:rPr lang="hu-HU" sz="2000" b="1" dirty="0">
+                <a:latin typeface="Bahnschrift" panose="020B0502040204020203" pitchFamily="34" charset="0"/>
+              </a:rPr>
               <a:t>Digitális eszköz: </a:t>
             </a:r>
             <a:r>
-              <a:rPr lang="hu-HU" sz="2000" dirty="0"/>
+              <a:rPr lang="hu-HU" sz="2000" dirty="0">
+                <a:latin typeface="Bahnschrift" panose="020B0502040204020203" pitchFamily="34" charset="0"/>
+              </a:rPr>
               <a:t>okostelefon és számítógép</a:t>
             </a:r>
           </a:p>
           <a:p>
             <a:r>
-              <a:rPr lang="hu-HU" sz="2000" b="1" dirty="0"/>
+              <a:rPr lang="hu-HU" sz="2000" b="1" dirty="0">
+                <a:latin typeface="Bahnschrift" panose="020B0502040204020203" pitchFamily="34" charset="0"/>
+              </a:rPr>
               <a:t>Online tevékenység: </a:t>
             </a:r>
             <a:r>
-              <a:rPr lang="hu-HU" sz="2000" dirty="0"/>
+              <a:rPr lang="hu-HU" sz="2000" dirty="0">
+                <a:latin typeface="Bahnschrift" panose="020B0502040204020203" pitchFamily="34" charset="0"/>
+              </a:rPr>
               <a:t>webáruházak használata és </a:t>
             </a:r>
             <a:r>
-              <a:rPr lang="hu-HU" sz="2000" dirty="0" err="1"/>
+              <a:rPr lang="hu-HU" sz="2000" dirty="0" err="1">
+                <a:latin typeface="Bahnschrift" panose="020B0502040204020203" pitchFamily="34" charset="0"/>
+              </a:rPr>
               <a:t>internetbankolás</a:t>
             </a:r>
-            <a:endParaRPr lang="hu-HU" sz="2000" dirty="0"/>
-          </a:p>
-          <a:p>
-            <a:r>
-              <a:rPr lang="hu-HU" sz="2000" b="1" dirty="0"/>
+            <a:endParaRPr lang="hu-HU" sz="2000" dirty="0">
+              <a:latin typeface="Bahnschrift" panose="020B0502040204020203" pitchFamily="34" charset="0"/>
+            </a:endParaRPr>
+          </a:p>
+          <a:p>
+            <a:r>
+              <a:rPr lang="hu-HU" sz="2000" b="1" dirty="0">
+                <a:latin typeface="Bahnschrift" panose="020B0502040204020203" pitchFamily="34" charset="0"/>
+              </a:rPr>
               <a:t>Biztonsági probléma: </a:t>
             </a:r>
             <a:r>
-              <a:rPr lang="hu-HU" sz="2000" dirty="0"/>
+              <a:rPr lang="hu-HU" sz="2000" dirty="0">
+                <a:latin typeface="Bahnschrift" panose="020B0502040204020203" pitchFamily="34" charset="0"/>
+              </a:rPr>
               <a:t>gyanús e-maileket és SMS-</a:t>
             </a:r>
             <a:r>
-              <a:rPr lang="hu-HU" sz="2000" dirty="0" err="1"/>
+              <a:rPr lang="hu-HU" sz="2000" dirty="0" err="1">
+                <a:latin typeface="Bahnschrift" panose="020B0502040204020203" pitchFamily="34" charset="0"/>
+              </a:rPr>
               <a:t>eket</a:t>
             </a:r>
             <a:r>
-              <a:rPr lang="hu-HU" sz="2000" dirty="0"/>
+              <a:rPr lang="hu-HU" sz="2000" dirty="0">
+                <a:latin typeface="Bahnschrift" panose="020B0502040204020203" pitchFamily="34" charset="0"/>
+              </a:rPr>
               <a:t> kap, amelyek egy bank vagy webáruház nevében kérnek adatokat.</a:t>
             </a:r>
           </a:p>
@@ -6572,8 +6999,8 @@
         </p:nvSpPr>
         <p:spPr>
           <a:xfrm>
-            <a:off x="9416714" y="1391936"/>
-            <a:ext cx="2775286" cy="4401205"/>
+            <a:off x="9416714" y="1477656"/>
+            <a:ext cx="2775286" cy="4093428"/>
           </a:xfrm>
           <a:prstGeom prst="rect">
             <a:avLst/>
@@ -6587,55 +7014,79 @@
           <a:lstStyle/>
           <a:p>
             <a:r>
-              <a:rPr lang="hu-HU" sz="2000" b="1" dirty="0"/>
+              <a:rPr lang="hu-HU" sz="2000" b="1" dirty="0">
+                <a:latin typeface="Bahnschrift" panose="020B0502040204020203" pitchFamily="34" charset="0"/>
+              </a:rPr>
               <a:t>József</a:t>
             </a:r>
             <a:r>
-              <a:rPr lang="hu-HU" sz="2000" dirty="0"/>
+              <a:rPr lang="hu-HU" sz="2000" dirty="0">
+                <a:latin typeface="Bahnschrift" panose="020B0502040204020203" pitchFamily="34" charset="0"/>
+              </a:rPr>
               <a:t> – 68 éves nagypapa</a:t>
             </a:r>
           </a:p>
           <a:p>
             <a:r>
-              <a:rPr lang="hu-HU" sz="2000" b="1" dirty="0"/>
+              <a:rPr lang="hu-HU" sz="2000" b="1" dirty="0">
+                <a:latin typeface="Bahnschrift" panose="020B0502040204020203" pitchFamily="34" charset="0"/>
+              </a:rPr>
               <a:t>Digitális eszköz: </a:t>
             </a:r>
             <a:r>
-              <a:rPr lang="hu-HU" sz="2000" dirty="0" err="1"/>
+              <a:rPr lang="hu-HU" sz="2000" dirty="0" err="1">
+                <a:latin typeface="Bahnschrift" panose="020B0502040204020203" pitchFamily="34" charset="0"/>
+              </a:rPr>
               <a:t>tablet</a:t>
             </a:r>
-            <a:endParaRPr lang="hu-HU" sz="2000" dirty="0"/>
-          </a:p>
-          <a:p>
-            <a:r>
-              <a:rPr lang="hu-HU" sz="2000" b="1" dirty="0"/>
+            <a:endParaRPr lang="hu-HU" sz="2000" dirty="0">
+              <a:latin typeface="Bahnschrift" panose="020B0502040204020203" pitchFamily="34" charset="0"/>
+            </a:endParaRPr>
+          </a:p>
+          <a:p>
+            <a:r>
+              <a:rPr lang="hu-HU" sz="2000" b="1" dirty="0">
+                <a:latin typeface="Bahnschrift" panose="020B0502040204020203" pitchFamily="34" charset="0"/>
+              </a:rPr>
               <a:t>Online tevékenység: </a:t>
             </a:r>
             <a:r>
-              <a:rPr lang="hu-HU" sz="2000" dirty="0"/>
+              <a:rPr lang="hu-HU" sz="2000" dirty="0">
+                <a:latin typeface="Bahnschrift" panose="020B0502040204020203" pitchFamily="34" charset="0"/>
+              </a:rPr>
               <a:t>e-</a:t>
             </a:r>
             <a:r>
-              <a:rPr lang="hu-HU" sz="2000" dirty="0" err="1"/>
+              <a:rPr lang="hu-HU" sz="2000" dirty="0" err="1">
+                <a:latin typeface="Bahnschrift" panose="020B0502040204020203" pitchFamily="34" charset="0"/>
+              </a:rPr>
               <a:t>mailezés</a:t>
             </a:r>
             <a:r>
-              <a:rPr lang="hu-HU" sz="2000" dirty="0"/>
+              <a:rPr lang="hu-HU" sz="2000" dirty="0">
+                <a:latin typeface="Bahnschrift" panose="020B0502040204020203" pitchFamily="34" charset="0"/>
+              </a:rPr>
               <a:t> és hírek olvasása</a:t>
             </a:r>
           </a:p>
           <a:p>
             <a:r>
-              <a:rPr lang="hu-HU" sz="2000" b="1" dirty="0"/>
+              <a:rPr lang="hu-HU" sz="2000" b="1" dirty="0">
+                <a:latin typeface="Bahnschrift" panose="020B0502040204020203" pitchFamily="34" charset="0"/>
+              </a:rPr>
               <a:t>Biztonsági probléma: </a:t>
             </a:r>
             <a:r>
-              <a:rPr lang="hu-HU" sz="2000" dirty="0"/>
+              <a:rPr lang="hu-HU" sz="2000" dirty="0">
+                <a:latin typeface="Bahnschrift" panose="020B0502040204020203" pitchFamily="34" charset="0"/>
+              </a:rPr>
               <a:t>könnyen megtéveszthetik az adathalász üzenetek és hamis nyereményjátékok.</a:t>
             </a:r>
           </a:p>
           <a:p>
-            <a:endParaRPr lang="hu-HU" sz="2000" dirty="0"/>
+            <a:endParaRPr lang="hu-HU" sz="2000" dirty="0">
+              <a:latin typeface="Bahnschrift" panose="020B0502040204020203" pitchFamily="34" charset="0"/>
+            </a:endParaRPr>
           </a:p>
         </p:txBody>
       </p:sp>
@@ -6692,85 +7143,131 @@
           <a:lstStyle/>
           <a:p>
             <a:r>
-              <a:rPr lang="hu-HU" sz="2000" dirty="0"/>
+              <a:rPr lang="hu-HU" sz="2000" dirty="0">
+                <a:latin typeface="Bahnschrift" panose="020B0502040204020203" pitchFamily="34" charset="0"/>
+              </a:rPr>
               <a:t>Felelősség: Gondoljuk át, mit teszünk közzé és milyen oldalakat használunk.</a:t>
             </a:r>
             <a:br>
-              <a:rPr lang="hu-HU" sz="2000" dirty="0"/>
-            </a:br>
-            <a:r>
-              <a:rPr lang="hu-HU" sz="2000" dirty="0"/>
+              <a:rPr lang="hu-HU" sz="2000" dirty="0">
+                <a:latin typeface="Bahnschrift" panose="020B0502040204020203" pitchFamily="34" charset="0"/>
+              </a:rPr>
+            </a:br>
+            <a:r>
+              <a:rPr lang="hu-HU" sz="2000" dirty="0">
+                <a:latin typeface="Bahnschrift" panose="020B0502040204020203" pitchFamily="34" charset="0"/>
+              </a:rPr>
               <a:t/>
             </a:r>
             <a:br>
-              <a:rPr lang="hu-HU" sz="2000" dirty="0"/>
-            </a:br>
-            <a:r>
-              <a:rPr lang="hu-HU" sz="2000" dirty="0"/>
+              <a:rPr lang="hu-HU" sz="2000" dirty="0">
+                <a:latin typeface="Bahnschrift" panose="020B0502040204020203" pitchFamily="34" charset="0"/>
+              </a:rPr>
+            </a:br>
+            <a:r>
+              <a:rPr lang="hu-HU" sz="2000" dirty="0">
+                <a:latin typeface="Bahnschrift" panose="020B0502040204020203" pitchFamily="34" charset="0"/>
+              </a:rPr>
               <a:t>Bizalom: Ne bízzunk meg automatikusan az interneten megismert emberekben vagy üzenetekben.</a:t>
             </a:r>
             <a:br>
-              <a:rPr lang="hu-HU" sz="2000" dirty="0"/>
-            </a:br>
-            <a:r>
-              <a:rPr lang="hu-HU" sz="2000" dirty="0"/>
+              <a:rPr lang="hu-HU" sz="2000" dirty="0">
+                <a:latin typeface="Bahnschrift" panose="020B0502040204020203" pitchFamily="34" charset="0"/>
+              </a:rPr>
+            </a:br>
+            <a:r>
+              <a:rPr lang="hu-HU" sz="2000" dirty="0">
+                <a:latin typeface="Bahnschrift" panose="020B0502040204020203" pitchFamily="34" charset="0"/>
+              </a:rPr>
               <a:t/>
             </a:r>
             <a:br>
-              <a:rPr lang="hu-HU" sz="2000" dirty="0"/>
-            </a:br>
-            <a:r>
-              <a:rPr lang="hu-HU" sz="2000" dirty="0"/>
+              <a:rPr lang="hu-HU" sz="2000" dirty="0">
+                <a:latin typeface="Bahnschrift" panose="020B0502040204020203" pitchFamily="34" charset="0"/>
+              </a:rPr>
+            </a:br>
+            <a:r>
+              <a:rPr lang="hu-HU" sz="2000" dirty="0">
+                <a:latin typeface="Bahnschrift" panose="020B0502040204020203" pitchFamily="34" charset="0"/>
+              </a:rPr>
               <a:t>Őszinteség: Ha problémába ütközünk, mondjuk el egy megbízható felnőttnek vagy más segítő személynek.</a:t>
             </a:r>
             <a:br>
-              <a:rPr lang="hu-HU" sz="2000" dirty="0"/>
-            </a:br>
-            <a:r>
-              <a:rPr lang="hu-HU" sz="2000" dirty="0"/>
+              <a:rPr lang="hu-HU" sz="2000" dirty="0">
+                <a:latin typeface="Bahnschrift" panose="020B0502040204020203" pitchFamily="34" charset="0"/>
+              </a:rPr>
+            </a:br>
+            <a:r>
+              <a:rPr lang="hu-HU" sz="2000" dirty="0">
+                <a:latin typeface="Bahnschrift" panose="020B0502040204020203" pitchFamily="34" charset="0"/>
+              </a:rPr>
               <a:t/>
             </a:r>
             <a:br>
-              <a:rPr lang="hu-HU" sz="2000" dirty="0"/>
-            </a:br>
-            <a:r>
-              <a:rPr lang="hu-HU" sz="2000" dirty="0"/>
+              <a:rPr lang="hu-HU" sz="2000" dirty="0">
+                <a:latin typeface="Bahnschrift" panose="020B0502040204020203" pitchFamily="34" charset="0"/>
+              </a:rPr>
+            </a:br>
+            <a:r>
+              <a:rPr lang="hu-HU" sz="2000" dirty="0">
+                <a:latin typeface="Bahnschrift" panose="020B0502040204020203" pitchFamily="34" charset="0"/>
+              </a:rPr>
               <a:t>Mások adatainak tisztelete: Mások fényképét, adatait vagy üzeneteit ne osszuk meg engedély nélkül.</a:t>
             </a:r>
             <a:br>
-              <a:rPr lang="hu-HU" sz="2000" dirty="0"/>
-            </a:br>
-            <a:r>
-              <a:rPr lang="hu-HU" sz="2000" dirty="0"/>
+              <a:rPr lang="hu-HU" sz="2000" dirty="0">
+                <a:latin typeface="Bahnschrift" panose="020B0502040204020203" pitchFamily="34" charset="0"/>
+              </a:rPr>
+            </a:br>
+            <a:r>
+              <a:rPr lang="hu-HU" sz="2000" dirty="0">
+                <a:latin typeface="Bahnschrift" panose="020B0502040204020203" pitchFamily="34" charset="0"/>
+              </a:rPr>
               <a:t/>
             </a:r>
             <a:br>
-              <a:rPr lang="hu-HU" sz="2000" dirty="0"/>
-            </a:br>
-            <a:r>
-              <a:rPr lang="hu-HU" sz="2000" dirty="0"/>
+              <a:rPr lang="hu-HU" sz="2000" dirty="0">
+                <a:latin typeface="Bahnschrift" panose="020B0502040204020203" pitchFamily="34" charset="0"/>
+              </a:rPr>
+            </a:br>
+            <a:r>
+              <a:rPr lang="hu-HU" sz="2000" dirty="0">
+                <a:latin typeface="Bahnschrift" panose="020B0502040204020203" pitchFamily="34" charset="0"/>
+              </a:rPr>
               <a:t>Önfegyelem: Ne </a:t>
             </a:r>
             <a:r>
-              <a:rPr lang="hu-HU" sz="2000" dirty="0" err="1"/>
+              <a:rPr lang="hu-HU" sz="2000" dirty="0" err="1">
+                <a:latin typeface="Bahnschrift" panose="020B0502040204020203" pitchFamily="34" charset="0"/>
+              </a:rPr>
               <a:t>töltsünk</a:t>
             </a:r>
             <a:r>
-              <a:rPr lang="hu-HU" sz="2000" dirty="0"/>
+              <a:rPr lang="hu-HU" sz="2000" dirty="0">
+                <a:latin typeface="Bahnschrift" panose="020B0502040204020203" pitchFamily="34" charset="0"/>
+              </a:rPr>
               <a:t> túl sok időt online, és ne kattintsunk gondolkodás nélkül minden hivatkozásra.</a:t>
             </a:r>
             <a:br>
-              <a:rPr lang="hu-HU" sz="2000" dirty="0"/>
-            </a:br>
-            <a:r>
-              <a:rPr lang="hu-HU" sz="2000" dirty="0"/>
+              <a:rPr lang="hu-HU" sz="2000" dirty="0">
+                <a:latin typeface="Bahnschrift" panose="020B0502040204020203" pitchFamily="34" charset="0"/>
+              </a:rPr>
+            </a:br>
+            <a:r>
+              <a:rPr lang="hu-HU" sz="2000" dirty="0">
+                <a:latin typeface="Bahnschrift" panose="020B0502040204020203" pitchFamily="34" charset="0"/>
+              </a:rPr>
               <a:t/>
             </a:r>
             <a:br>
-              <a:rPr lang="hu-HU" sz="2000" dirty="0"/>
-            </a:br>
-            <a:r>
-              <a:rPr lang="hu-HU" sz="2000" dirty="0"/>
+              <a:rPr lang="hu-HU" sz="2000" dirty="0">
+                <a:latin typeface="Bahnschrift" panose="020B0502040204020203" pitchFamily="34" charset="0"/>
+              </a:rPr>
+            </a:br>
+            <a:r>
+              <a:rPr lang="hu-HU" sz="2000" dirty="0">
+                <a:latin typeface="Bahnschrift" panose="020B0502040204020203" pitchFamily="34" charset="0"/>
+              </a:rPr>
               <a:t>Segítségnyújtás: Ha valaki bajba kerül az interneten, ne nevessük ki, hanem segítsünk neki és kérjünk segítséget.</a:t>
             </a:r>
           </a:p>
@@ -6799,10 +7296,14 @@
           <a:lstStyle/>
           <a:p>
             <a:r>
-              <a:rPr lang="hu-HU" sz="3600" b="1" dirty="0"/>
+              <a:rPr lang="hu-HU" sz="3600" b="1" dirty="0">
+                <a:latin typeface="Arial Rounded MT Bold" panose="020F0704030504030204" pitchFamily="34" charset="0"/>
+              </a:rPr>
               <a:t>A biztonságos internethasználat hat alapelve</a:t>
             </a:r>
-            <a:endParaRPr lang="hu-HU" sz="3600" dirty="0"/>
+            <a:endParaRPr lang="hu-HU" sz="3600" dirty="0">
+              <a:latin typeface="Arial Rounded MT Bold" panose="020F0704030504030204" pitchFamily="34" charset="0"/>
+            </a:endParaRPr>
           </a:p>
         </p:txBody>
       </p:sp>
@@ -6859,106 +7360,164 @@
           <a:lstStyle/>
           <a:p>
             <a:r>
-              <a:rPr lang="hu-HU" sz="1800" dirty="0"/>
+              <a:rPr lang="hu-HU" sz="1800" dirty="0">
+                <a:latin typeface="Bahnschrift" panose="020B0502040204020203" pitchFamily="34" charset="0"/>
+              </a:rPr>
               <a:t>Miért fontos a jó jelszó?</a:t>
             </a:r>
             <a:br>
-              <a:rPr lang="hu-HU" sz="1800" dirty="0"/>
-            </a:br>
-            <a:r>
-              <a:rPr lang="hu-HU" sz="1800" dirty="0"/>
+              <a:rPr lang="hu-HU" sz="1800" dirty="0">
+                <a:latin typeface="Bahnschrift" panose="020B0502040204020203" pitchFamily="34" charset="0"/>
+              </a:rPr>
+            </a:br>
+            <a:r>
+              <a:rPr lang="hu-HU" sz="1800" dirty="0">
+                <a:latin typeface="Bahnschrift" panose="020B0502040204020203" pitchFamily="34" charset="0"/>
+              </a:rPr>
               <a:t>A jelszó védi a fiókjainkat és az azokban tárolt személyes adatokat. Ha valaki megszerzi a </a:t>
             </a:r>
             <a:r>
-              <a:rPr lang="hu-HU" sz="1800" dirty="0" err="1"/>
+              <a:rPr lang="hu-HU" sz="1800" dirty="0" err="1">
+                <a:latin typeface="Bahnschrift" panose="020B0502040204020203" pitchFamily="34" charset="0"/>
+              </a:rPr>
               <a:t>jelszavunkat</a:t>
             </a:r>
             <a:r>
-              <a:rPr lang="hu-HU" sz="1800" dirty="0"/>
+              <a:rPr lang="hu-HU" sz="1800" dirty="0">
+                <a:latin typeface="Bahnschrift" panose="020B0502040204020203" pitchFamily="34" charset="0"/>
+              </a:rPr>
               <a:t>, hozzáférhet az e-mailjeinkhez, fényképeinkhez, közösségi médiafiókunkhoz vagy akár pénzügyi adatainkhoz is.</a:t>
             </a:r>
             <a:br>
-              <a:rPr lang="hu-HU" sz="1800" dirty="0"/>
-            </a:br>
-            <a:r>
-              <a:rPr lang="hu-HU" sz="1800" dirty="0"/>
+              <a:rPr lang="hu-HU" sz="1800" dirty="0">
+                <a:latin typeface="Bahnschrift" panose="020B0502040204020203" pitchFamily="34" charset="0"/>
+              </a:rPr>
+            </a:br>
+            <a:r>
+              <a:rPr lang="hu-HU" sz="1800" dirty="0">
+                <a:latin typeface="Bahnschrift" panose="020B0502040204020203" pitchFamily="34" charset="0"/>
+              </a:rPr>
               <a:t/>
             </a:r>
             <a:br>
-              <a:rPr lang="hu-HU" sz="1800" dirty="0"/>
-            </a:br>
-            <a:r>
-              <a:rPr lang="hu-HU" sz="1800" dirty="0"/>
+              <a:rPr lang="hu-HU" sz="1800" dirty="0">
+                <a:latin typeface="Bahnschrift" panose="020B0502040204020203" pitchFamily="34" charset="0"/>
+              </a:rPr>
+            </a:br>
+            <a:r>
+              <a:rPr lang="hu-HU" sz="1800" dirty="0">
+                <a:latin typeface="Bahnschrift" panose="020B0502040204020203" pitchFamily="34" charset="0"/>
+              </a:rPr>
               <a:t>A Kovács családban Bence több különböző oldalon ugyanazt a jelszót használja. Ez veszélyes, mert ha az egyik szolgáltatásnál kiszivárog a jelszó, a támadó más fiókokba is megpróbálhat belépni.</a:t>
             </a:r>
             <a:br>
-              <a:rPr lang="hu-HU" sz="1800" dirty="0"/>
-            </a:br>
-            <a:r>
-              <a:rPr lang="hu-HU" sz="1800" dirty="0"/>
+              <a:rPr lang="hu-HU" sz="1800" dirty="0">
+                <a:latin typeface="Bahnschrift" panose="020B0502040204020203" pitchFamily="34" charset="0"/>
+              </a:rPr>
+            </a:br>
+            <a:r>
+              <a:rPr lang="hu-HU" sz="1800" dirty="0">
+                <a:latin typeface="Bahnschrift" panose="020B0502040204020203" pitchFamily="34" charset="0"/>
+              </a:rPr>
               <a:t/>
             </a:r>
             <a:br>
-              <a:rPr lang="hu-HU" sz="1800" dirty="0"/>
-            </a:br>
-            <a:r>
-              <a:rPr lang="hu-HU" sz="1800" dirty="0"/>
+              <a:rPr lang="hu-HU" sz="1800" dirty="0">
+                <a:latin typeface="Bahnschrift" panose="020B0502040204020203" pitchFamily="34" charset="0"/>
+              </a:rPr>
+            </a:br>
+            <a:r>
+              <a:rPr lang="hu-HU" sz="1800" dirty="0">
+                <a:latin typeface="Bahnschrift" panose="020B0502040204020203" pitchFamily="34" charset="0"/>
+              </a:rPr>
               <a:t>Milyen a biztonságos jelszó?</a:t>
             </a:r>
             <a:br>
-              <a:rPr lang="hu-HU" sz="1800" dirty="0"/>
-            </a:br>
-            <a:r>
-              <a:rPr lang="hu-HU" sz="1800" dirty="0"/>
+              <a:rPr lang="hu-HU" sz="1800" dirty="0">
+                <a:latin typeface="Bahnschrift" panose="020B0502040204020203" pitchFamily="34" charset="0"/>
+              </a:rPr>
+            </a:br>
+            <a:r>
+              <a:rPr lang="hu-HU" sz="1800" dirty="0">
+                <a:latin typeface="Bahnschrift" panose="020B0502040204020203" pitchFamily="34" charset="0"/>
+              </a:rPr>
               <a:t>A biztonságos jelszó:</a:t>
             </a:r>
             <a:br>
-              <a:rPr lang="hu-HU" sz="1800" dirty="0"/>
-            </a:br>
-            <a:r>
-              <a:rPr lang="hu-HU" sz="1800" dirty="0"/>
+              <a:rPr lang="hu-HU" sz="1800" dirty="0">
+                <a:latin typeface="Bahnschrift" panose="020B0502040204020203" pitchFamily="34" charset="0"/>
+              </a:rPr>
+            </a:br>
+            <a:r>
+              <a:rPr lang="hu-HU" sz="1800" dirty="0">
+                <a:latin typeface="Bahnschrift" panose="020B0502040204020203" pitchFamily="34" charset="0"/>
+              </a:rPr>
               <a:t/>
             </a:r>
             <a:br>
-              <a:rPr lang="hu-HU" sz="1800" dirty="0"/>
-            </a:br>
-            <a:r>
-              <a:rPr lang="hu-HU" sz="1800" dirty="0"/>
+              <a:rPr lang="hu-HU" sz="1800" dirty="0">
+                <a:latin typeface="Bahnschrift" panose="020B0502040204020203" pitchFamily="34" charset="0"/>
+              </a:rPr>
+            </a:br>
+            <a:r>
+              <a:rPr lang="hu-HU" sz="1800" dirty="0">
+                <a:latin typeface="Bahnschrift" panose="020B0502040204020203" pitchFamily="34" charset="0"/>
+              </a:rPr>
               <a:t>hosszú;</a:t>
             </a:r>
             <a:br>
-              <a:rPr lang="hu-HU" sz="1800" dirty="0"/>
-            </a:br>
-            <a:r>
-              <a:rPr lang="hu-HU" sz="1800" dirty="0"/>
+              <a:rPr lang="hu-HU" sz="1800" dirty="0">
+                <a:latin typeface="Bahnschrift" panose="020B0502040204020203" pitchFamily="34" charset="0"/>
+              </a:rPr>
+            </a:br>
+            <a:r>
+              <a:rPr lang="hu-HU" sz="1800" dirty="0">
+                <a:latin typeface="Bahnschrift" panose="020B0502040204020203" pitchFamily="34" charset="0"/>
+              </a:rPr>
               <a:t>nehezen kitalálható;</a:t>
             </a:r>
             <a:br>
-              <a:rPr lang="hu-HU" sz="1800" dirty="0"/>
-            </a:br>
-            <a:r>
-              <a:rPr lang="hu-HU" sz="1800" dirty="0"/>
+              <a:rPr lang="hu-HU" sz="1800" dirty="0">
+                <a:latin typeface="Bahnschrift" panose="020B0502040204020203" pitchFamily="34" charset="0"/>
+              </a:rPr>
+            </a:br>
+            <a:r>
+              <a:rPr lang="hu-HU" sz="1800" dirty="0">
+                <a:latin typeface="Bahnschrift" panose="020B0502040204020203" pitchFamily="34" charset="0"/>
+              </a:rPr>
               <a:t>nem tartalmaz könnyen megszerezhető személyes adatot;</a:t>
             </a:r>
             <a:br>
-              <a:rPr lang="hu-HU" sz="1800" dirty="0"/>
-            </a:br>
-            <a:r>
-              <a:rPr lang="hu-HU" sz="1800" dirty="0"/>
+              <a:rPr lang="hu-HU" sz="1800" dirty="0">
+                <a:latin typeface="Bahnschrift" panose="020B0502040204020203" pitchFamily="34" charset="0"/>
+              </a:rPr>
+            </a:br>
+            <a:r>
+              <a:rPr lang="hu-HU" sz="1800" dirty="0">
+                <a:latin typeface="Bahnschrift" panose="020B0502040204020203" pitchFamily="34" charset="0"/>
+              </a:rPr>
               <a:t>nem ugyanaz, mint amit más oldalakon használunk;</a:t>
             </a:r>
             <a:br>
-              <a:rPr lang="hu-HU" sz="1800" dirty="0"/>
-            </a:br>
-            <a:r>
-              <a:rPr lang="hu-HU" sz="1800" dirty="0"/>
+              <a:rPr lang="hu-HU" sz="1800" dirty="0">
+                <a:latin typeface="Bahnschrift" panose="020B0502040204020203" pitchFamily="34" charset="0"/>
+              </a:rPr>
+            </a:br>
+            <a:r>
+              <a:rPr lang="hu-HU" sz="1800" dirty="0">
+                <a:latin typeface="Bahnschrift" panose="020B0502040204020203" pitchFamily="34" charset="0"/>
+              </a:rPr>
               <a:t>lehetőleg egyedi minden fontos fiókhoz.</a:t>
             </a:r>
             <a:br>
-              <a:rPr lang="hu-HU" sz="1800" dirty="0"/>
-            </a:br>
-            <a:r>
-              <a:rPr lang="hu-HU" sz="1800" dirty="0"/>
+              <a:rPr lang="hu-HU" sz="1800" dirty="0">
+                <a:latin typeface="Bahnschrift" panose="020B0502040204020203" pitchFamily="34" charset="0"/>
+              </a:rPr>
+            </a:br>
+            <a:r>
+              <a:rPr lang="hu-HU" sz="1800" dirty="0">
+                <a:latin typeface="Bahnschrift" panose="020B0502040204020203" pitchFamily="34" charset="0"/>
+              </a:rPr>
               <a:t>Érdemes hosszú jelszómondatot vagy jelszókezelő által létrehozott egyedi jelszót használni.</a:t>
             </a:r>
           </a:p>
@@ -6987,10 +7546,14 @@
           <a:lstStyle/>
           <a:p>
             <a:r>
-              <a:rPr lang="hu-HU" sz="3600" b="1" dirty="0"/>
+              <a:rPr lang="hu-HU" sz="3600" b="1" dirty="0">
+                <a:latin typeface="Arial Rounded MT Bold" panose="020F0704030504030204" pitchFamily="34" charset="0"/>
+              </a:rPr>
               <a:t>Biztonságos jelszavak</a:t>
             </a:r>
-            <a:endParaRPr lang="hu-HU" sz="3600" dirty="0"/>
+            <a:endParaRPr lang="hu-HU" sz="3600" dirty="0">
+              <a:latin typeface="Arial Rounded MT Bold" panose="020F0704030504030204" pitchFamily="34" charset="0"/>
+            </a:endParaRPr>
           </a:p>
         </p:txBody>
       </p:sp>
@@ -7047,116 +7610,178 @@
           <a:lstStyle/>
           <a:p>
             <a:r>
-              <a:rPr lang="hu-HU" sz="2000" dirty="0"/>
+              <a:rPr lang="hu-HU" sz="2000" dirty="0">
+                <a:latin typeface="Bahnschrift" panose="020B0502040204020203" pitchFamily="34" charset="0"/>
+              </a:rPr>
               <a:t>Többfaktoros hitelesítés</a:t>
             </a:r>
             <a:br>
-              <a:rPr lang="hu-HU" sz="2000" dirty="0"/>
-            </a:br>
-            <a:r>
-              <a:rPr lang="hu-HU" sz="2000" dirty="0"/>
+              <a:rPr lang="hu-HU" sz="2000" dirty="0">
+                <a:latin typeface="Bahnschrift" panose="020B0502040204020203" pitchFamily="34" charset="0"/>
+              </a:rPr>
+            </a:br>
+            <a:r>
+              <a:rPr lang="hu-HU" sz="2000" dirty="0">
+                <a:latin typeface="Bahnschrift" panose="020B0502040204020203" pitchFamily="34" charset="0"/>
+              </a:rPr>
               <a:t>Ahol lehetséges, kapcsoljuk be a többfaktoros hitelesítést. Ilyenkor a jelszó mellett egy másik ellenőrzésre is szükség van, például hitelesítő alkalmazás által létrehozott kódra.</a:t>
             </a:r>
             <a:br>
-              <a:rPr lang="hu-HU" sz="2000" dirty="0"/>
-            </a:br>
-            <a:r>
-              <a:rPr lang="hu-HU" sz="2000" dirty="0"/>
+              <a:rPr lang="hu-HU" sz="2000" dirty="0">
+                <a:latin typeface="Bahnschrift" panose="020B0502040204020203" pitchFamily="34" charset="0"/>
+              </a:rPr>
+            </a:br>
+            <a:r>
+              <a:rPr lang="hu-HU" sz="2000" dirty="0">
+                <a:latin typeface="Bahnschrift" panose="020B0502040204020203" pitchFamily="34" charset="0"/>
+              </a:rPr>
               <a:t/>
             </a:r>
             <a:br>
-              <a:rPr lang="hu-HU" sz="2000" dirty="0"/>
-            </a:br>
-            <a:r>
-              <a:rPr lang="hu-HU" sz="2000" dirty="0"/>
+              <a:rPr lang="hu-HU" sz="2000" dirty="0">
+                <a:latin typeface="Bahnschrift" panose="020B0502040204020203" pitchFamily="34" charset="0"/>
+              </a:rPr>
+            </a:br>
+            <a:r>
+              <a:rPr lang="hu-HU" sz="2000" dirty="0">
+                <a:latin typeface="Bahnschrift" panose="020B0502040204020203" pitchFamily="34" charset="0"/>
+              </a:rPr>
               <a:t>Ez akkor is további védelmet jelenthet, ha valaki megszerzi a </a:t>
             </a:r>
             <a:r>
-              <a:rPr lang="hu-HU" sz="2000" dirty="0" err="1"/>
+              <a:rPr lang="hu-HU" sz="2000" dirty="0" err="1">
+                <a:latin typeface="Bahnschrift" panose="020B0502040204020203" pitchFamily="34" charset="0"/>
+              </a:rPr>
               <a:t>jelszavunkat</a:t>
             </a:r>
             <a:r>
-              <a:rPr lang="hu-HU" sz="2000" dirty="0"/>
+              <a:rPr lang="hu-HU" sz="2000" dirty="0">
+                <a:latin typeface="Bahnschrift" panose="020B0502040204020203" pitchFamily="34" charset="0"/>
+              </a:rPr>
               <a:t>.</a:t>
             </a:r>
             <a:br>
-              <a:rPr lang="hu-HU" sz="2000" dirty="0"/>
-            </a:br>
-            <a:r>
-              <a:rPr lang="hu-HU" sz="2000" dirty="0"/>
+              <a:rPr lang="hu-HU" sz="2000" dirty="0">
+                <a:latin typeface="Bahnschrift" panose="020B0502040204020203" pitchFamily="34" charset="0"/>
+              </a:rPr>
+            </a:br>
+            <a:r>
+              <a:rPr lang="hu-HU" sz="2000" dirty="0">
+                <a:latin typeface="Bahnschrift" panose="020B0502040204020203" pitchFamily="34" charset="0"/>
+              </a:rPr>
               <a:t/>
             </a:r>
             <a:br>
-              <a:rPr lang="hu-HU" sz="2000" dirty="0"/>
-            </a:br>
-            <a:r>
-              <a:rPr lang="hu-HU" sz="2000" dirty="0"/>
+              <a:rPr lang="hu-HU" sz="2000" dirty="0">
+                <a:latin typeface="Bahnschrift" panose="020B0502040204020203" pitchFamily="34" charset="0"/>
+              </a:rPr>
+            </a:br>
+            <a:r>
+              <a:rPr lang="hu-HU" sz="2000" dirty="0">
+                <a:latin typeface="Bahnschrift" panose="020B0502040204020203" pitchFamily="34" charset="0"/>
+              </a:rPr>
               <a:t>Mit ne használjunk jelszóként?</a:t>
             </a:r>
             <a:br>
-              <a:rPr lang="hu-HU" sz="2000" dirty="0"/>
-            </a:br>
-            <a:r>
-              <a:rPr lang="hu-HU" sz="2000" dirty="0"/>
+              <a:rPr lang="hu-HU" sz="2000" dirty="0">
+                <a:latin typeface="Bahnschrift" panose="020B0502040204020203" pitchFamily="34" charset="0"/>
+              </a:rPr>
+            </a:br>
+            <a:r>
+              <a:rPr lang="hu-HU" sz="2000" dirty="0">
+                <a:latin typeface="Bahnschrift" panose="020B0502040204020203" pitchFamily="34" charset="0"/>
+              </a:rPr>
               <a:t>Ne használjunk egyszerű vagy könnyen kitalálható jelszavakat, például:</a:t>
             </a:r>
             <a:br>
-              <a:rPr lang="hu-HU" sz="2000" dirty="0"/>
-            </a:br>
-            <a:r>
-              <a:rPr lang="hu-HU" sz="2000" dirty="0"/>
+              <a:rPr lang="hu-HU" sz="2000" dirty="0">
+                <a:latin typeface="Bahnschrift" panose="020B0502040204020203" pitchFamily="34" charset="0"/>
+              </a:rPr>
+            </a:br>
+            <a:r>
+              <a:rPr lang="hu-HU" sz="2000" dirty="0">
+                <a:latin typeface="Bahnschrift" panose="020B0502040204020203" pitchFamily="34" charset="0"/>
+              </a:rPr>
               <a:t/>
             </a:r>
             <a:br>
-              <a:rPr lang="hu-HU" sz="2000" dirty="0"/>
-            </a:br>
-            <a:r>
-              <a:rPr lang="hu-HU" sz="2000" dirty="0"/>
+              <a:rPr lang="hu-HU" sz="2000" dirty="0">
+                <a:latin typeface="Bahnschrift" panose="020B0502040204020203" pitchFamily="34" charset="0"/>
+              </a:rPr>
+            </a:br>
+            <a:r>
+              <a:rPr lang="hu-HU" sz="2000" dirty="0">
+                <a:latin typeface="Bahnschrift" panose="020B0502040204020203" pitchFamily="34" charset="0"/>
+              </a:rPr>
               <a:t>„123456”, „</a:t>
             </a:r>
             <a:r>
-              <a:rPr lang="hu-HU" sz="2000" dirty="0" err="1"/>
+              <a:rPr lang="hu-HU" sz="2000" dirty="0" err="1">
+                <a:latin typeface="Bahnschrift" panose="020B0502040204020203" pitchFamily="34" charset="0"/>
+              </a:rPr>
               <a:t>password</a:t>
             </a:r>
             <a:r>
-              <a:rPr lang="hu-HU" sz="2000" dirty="0"/>
+              <a:rPr lang="hu-HU" sz="2000" dirty="0">
+                <a:latin typeface="Bahnschrift" panose="020B0502040204020203" pitchFamily="34" charset="0"/>
+              </a:rPr>
               <a:t>”, „</a:t>
             </a:r>
             <a:r>
-              <a:rPr lang="hu-HU" sz="2000" dirty="0" err="1"/>
+              <a:rPr lang="hu-HU" sz="2000" dirty="0" err="1">
+                <a:latin typeface="Bahnschrift" panose="020B0502040204020203" pitchFamily="34" charset="0"/>
+              </a:rPr>
               <a:t>qwerty</a:t>
             </a:r>
             <a:r>
-              <a:rPr lang="hu-HU" sz="2000" dirty="0"/>
+              <a:rPr lang="hu-HU" sz="2000" dirty="0">
+                <a:latin typeface="Bahnschrift" panose="020B0502040204020203" pitchFamily="34" charset="0"/>
+              </a:rPr>
               <a:t>”, saját nevünk, születési dátumunk vagy háziállatunk neve.</a:t>
             </a:r>
             <a:br>
-              <a:rPr lang="hu-HU" sz="2000" dirty="0"/>
-            </a:br>
-            <a:r>
-              <a:rPr lang="hu-HU" sz="2000" dirty="0"/>
+              <a:rPr lang="hu-HU" sz="2000" dirty="0">
+                <a:latin typeface="Bahnschrift" panose="020B0502040204020203" pitchFamily="34" charset="0"/>
+              </a:rPr>
+            </a:br>
+            <a:r>
+              <a:rPr lang="hu-HU" sz="2000" dirty="0">
+                <a:latin typeface="Bahnschrift" panose="020B0502040204020203" pitchFamily="34" charset="0"/>
+              </a:rPr>
               <a:t/>
             </a:r>
             <a:br>
-              <a:rPr lang="hu-HU" sz="2000" dirty="0"/>
-            </a:br>
-            <a:r>
-              <a:rPr lang="hu-HU" sz="2000" dirty="0"/>
+              <a:rPr lang="hu-HU" sz="2000" dirty="0">
+                <a:latin typeface="Bahnschrift" panose="020B0502040204020203" pitchFamily="34" charset="0"/>
+              </a:rPr>
+            </a:br>
+            <a:r>
+              <a:rPr lang="hu-HU" sz="2000" dirty="0">
+                <a:latin typeface="Bahnschrift" panose="020B0502040204020203" pitchFamily="34" charset="0"/>
+              </a:rPr>
               <a:t>Mit kell tenni, ha ellopták a </a:t>
             </a:r>
             <a:r>
-              <a:rPr lang="hu-HU" sz="2000" dirty="0" err="1"/>
+              <a:rPr lang="hu-HU" sz="2000" dirty="0" err="1">
+                <a:latin typeface="Bahnschrift" panose="020B0502040204020203" pitchFamily="34" charset="0"/>
+              </a:rPr>
               <a:t>jelszavunkat</a:t>
             </a:r>
             <a:r>
-              <a:rPr lang="hu-HU" sz="2000" dirty="0"/>
+              <a:rPr lang="hu-HU" sz="2000" dirty="0">
+                <a:latin typeface="Bahnschrift" panose="020B0502040204020203" pitchFamily="34" charset="0"/>
+              </a:rPr>
               <a:t>?</a:t>
             </a:r>
             <a:br>
-              <a:rPr lang="hu-HU" sz="2000" dirty="0"/>
-            </a:br>
-            <a:r>
-              <a:rPr lang="hu-HU" sz="2000" dirty="0"/>
+              <a:rPr lang="hu-HU" sz="2000" dirty="0">
+                <a:latin typeface="Bahnschrift" panose="020B0502040204020203" pitchFamily="34" charset="0"/>
+              </a:rPr>
+            </a:br>
+            <a:r>
+              <a:rPr lang="hu-HU" sz="2000" dirty="0">
+                <a:latin typeface="Bahnschrift" panose="020B0502040204020203" pitchFamily="34" charset="0"/>
+              </a:rPr>
               <a:t>Azonnal változtassuk meg a jelszót, és ha ugyanazt a jelszót máshol is használtuk, ott is cseréljük le. Kapcsoljuk be a többfaktoros hitelesítést, és ellenőrizzük a fiók biztonsági beállításait.</a:t>
             </a:r>
           </a:p>
@@ -7215,10 +7840,14 @@
           <a:lstStyle/>
           <a:p>
             <a:r>
-              <a:rPr lang="hu-HU" sz="3600" b="1" dirty="0"/>
+              <a:rPr lang="hu-HU" sz="3600" b="1" dirty="0">
+                <a:latin typeface="Arial Rounded MT Bold" panose="020F0704030504030204" pitchFamily="34" charset="0"/>
+              </a:rPr>
               <a:t>Adatvédelem</a:t>
             </a:r>
-            <a:endParaRPr lang="hu-HU" sz="3600" dirty="0"/>
+            <a:endParaRPr lang="hu-HU" sz="3600" dirty="0">
+              <a:latin typeface="Arial Rounded MT Bold" panose="020F0704030504030204" pitchFamily="34" charset="0"/>
+            </a:endParaRPr>
           </a:p>
         </p:txBody>
       </p:sp>
@@ -7245,92 +7874,142 @@
           <a:lstStyle/>
           <a:p>
             <a:r>
-              <a:rPr lang="hu-HU" sz="2000" dirty="0"/>
+              <a:rPr lang="hu-HU" sz="2000" dirty="0">
+                <a:latin typeface="Bahnschrift" panose="020B0502040204020203" pitchFamily="34" charset="0"/>
+              </a:rPr>
               <a:t>Mit jelent az adatvédelem?</a:t>
             </a:r>
             <a:br>
-              <a:rPr lang="hu-HU" sz="2000" dirty="0"/>
-            </a:br>
-            <a:r>
-              <a:rPr lang="hu-HU" sz="2000" dirty="0"/>
+              <a:rPr lang="hu-HU" sz="2000" dirty="0">
+                <a:latin typeface="Bahnschrift" panose="020B0502040204020203" pitchFamily="34" charset="0"/>
+              </a:rPr>
+            </a:br>
+            <a:r>
+              <a:rPr lang="hu-HU" sz="2000" dirty="0">
+                <a:latin typeface="Bahnschrift" panose="020B0502040204020203" pitchFamily="34" charset="0"/>
+              </a:rPr>
               <a:t>Az adatvédelem azt jelenti, hogy személyes adatainkat tudatosan kezeljük, és megakadályozzuk, hogy illetéktelenek hozzáférjenek azokhoz.</a:t>
             </a:r>
             <a:br>
-              <a:rPr lang="hu-HU" sz="2000" dirty="0"/>
-            </a:br>
-            <a:r>
-              <a:rPr lang="hu-HU" sz="2000" dirty="0"/>
+              <a:rPr lang="hu-HU" sz="2000" dirty="0">
+                <a:latin typeface="Bahnschrift" panose="020B0502040204020203" pitchFamily="34" charset="0"/>
+              </a:rPr>
+            </a:br>
+            <a:r>
+              <a:rPr lang="hu-HU" sz="2000" dirty="0">
+                <a:latin typeface="Bahnschrift" panose="020B0502040204020203" pitchFamily="34" charset="0"/>
+              </a:rPr>
               <a:t/>
             </a:r>
             <a:br>
-              <a:rPr lang="hu-HU" sz="2000" dirty="0"/>
-            </a:br>
-            <a:r>
-              <a:rPr lang="hu-HU" sz="2000" dirty="0"/>
+              <a:rPr lang="hu-HU" sz="2000" dirty="0">
+                <a:latin typeface="Bahnschrift" panose="020B0502040204020203" pitchFamily="34" charset="0"/>
+              </a:rPr>
+            </a:br>
+            <a:r>
+              <a:rPr lang="hu-HU" sz="2000" dirty="0">
+                <a:latin typeface="Bahnschrift" panose="020B0502040204020203" pitchFamily="34" charset="0"/>
+              </a:rPr>
               <a:t>Személyes adat lehet például a teljes nevünk, lakcímünk, telefonszámunk, e-mail-címünk, fényképünk, iskolánk neve vagy a tartózkodási helyünkre vonatkozó információ.</a:t>
             </a:r>
             <a:br>
-              <a:rPr lang="hu-HU" sz="2000" dirty="0"/>
-            </a:br>
-            <a:r>
-              <a:rPr lang="hu-HU" sz="2000" dirty="0"/>
+              <a:rPr lang="hu-HU" sz="2000" dirty="0">
+                <a:latin typeface="Bahnschrift" panose="020B0502040204020203" pitchFamily="34" charset="0"/>
+              </a:rPr>
+            </a:br>
+            <a:r>
+              <a:rPr lang="hu-HU" sz="2000" dirty="0">
+                <a:latin typeface="Bahnschrift" panose="020B0502040204020203" pitchFamily="34" charset="0"/>
+              </a:rPr>
               <a:t/>
             </a:r>
             <a:br>
-              <a:rPr lang="hu-HU" sz="2000" dirty="0"/>
-            </a:br>
-            <a:r>
-              <a:rPr lang="hu-HU" sz="2000" dirty="0"/>
+              <a:rPr lang="hu-HU" sz="2000" dirty="0">
+                <a:latin typeface="Bahnschrift" panose="020B0502040204020203" pitchFamily="34" charset="0"/>
+              </a:rPr>
+            </a:br>
+            <a:r>
+              <a:rPr lang="hu-HU" sz="2000" dirty="0">
+                <a:latin typeface="Bahnschrift" panose="020B0502040204020203" pitchFamily="34" charset="0"/>
+              </a:rPr>
               <a:t>Anna problémája</a:t>
             </a:r>
             <a:br>
-              <a:rPr lang="hu-HU" sz="2000" dirty="0"/>
-            </a:br>
-            <a:r>
-              <a:rPr lang="hu-HU" sz="2000" dirty="0"/>
+              <a:rPr lang="hu-HU" sz="2000" dirty="0">
+                <a:latin typeface="Bahnschrift" panose="020B0502040204020203" pitchFamily="34" charset="0"/>
+              </a:rPr>
+            </a:br>
+            <a:r>
+              <a:rPr lang="hu-HU" sz="2000" dirty="0">
+                <a:latin typeface="Bahnschrift" panose="020B0502040204020203" pitchFamily="34" charset="0"/>
+              </a:rPr>
               <a:t>Anna rendszeresen fényképeket tölt fel a közösségi médiára. Néha olyan képet is közzétesz, amelyen látható az iskolája, az utcája vagy az, hogy éppen hol tartózkodik.</a:t>
             </a:r>
             <a:br>
-              <a:rPr lang="hu-HU" sz="2000" dirty="0"/>
-            </a:br>
-            <a:r>
-              <a:rPr lang="hu-HU" sz="2000" dirty="0"/>
+              <a:rPr lang="hu-HU" sz="2000" dirty="0">
+                <a:latin typeface="Bahnschrift" panose="020B0502040204020203" pitchFamily="34" charset="0"/>
+              </a:rPr>
+            </a:br>
+            <a:r>
+              <a:rPr lang="hu-HU" sz="2000" dirty="0">
+                <a:latin typeface="Bahnschrift" panose="020B0502040204020203" pitchFamily="34" charset="0"/>
+              </a:rPr>
               <a:t/>
             </a:r>
             <a:br>
-              <a:rPr lang="hu-HU" sz="2000" dirty="0"/>
-            </a:br>
-            <a:r>
-              <a:rPr lang="hu-HU" sz="2000" dirty="0"/>
+              <a:rPr lang="hu-HU" sz="2000" dirty="0">
+                <a:latin typeface="Bahnschrift" panose="020B0502040204020203" pitchFamily="34" charset="0"/>
+              </a:rPr>
+            </a:br>
+            <a:r>
+              <a:rPr lang="hu-HU" sz="2000" dirty="0">
+                <a:latin typeface="Bahnschrift" panose="020B0502040204020203" pitchFamily="34" charset="0"/>
+              </a:rPr>
               <a:t>Ez azért veszélyes, mert az internetre feltöltött információkat mások elmenthetik, </a:t>
             </a:r>
             <a:r>
-              <a:rPr lang="hu-HU" sz="2000" dirty="0" err="1"/>
+              <a:rPr lang="hu-HU" sz="2000" dirty="0" err="1">
+                <a:latin typeface="Bahnschrift" panose="020B0502040204020203" pitchFamily="34" charset="0"/>
+              </a:rPr>
               <a:t>továbbküldhetik</a:t>
             </a:r>
             <a:r>
-              <a:rPr lang="hu-HU" sz="2000" dirty="0"/>
+              <a:rPr lang="hu-HU" sz="2000" dirty="0">
+                <a:latin typeface="Bahnschrift" panose="020B0502040204020203" pitchFamily="34" charset="0"/>
+              </a:rPr>
               <a:t> vagy rossz célra használhatják.</a:t>
             </a:r>
             <a:br>
-              <a:rPr lang="hu-HU" sz="2000" dirty="0"/>
-            </a:br>
-            <a:r>
-              <a:rPr lang="hu-HU" sz="2000" dirty="0"/>
+              <a:rPr lang="hu-HU" sz="2000" dirty="0">
+                <a:latin typeface="Bahnschrift" panose="020B0502040204020203" pitchFamily="34" charset="0"/>
+              </a:rPr>
+            </a:br>
+            <a:r>
+              <a:rPr lang="hu-HU" sz="2000" dirty="0">
+                <a:latin typeface="Bahnschrift" panose="020B0502040204020203" pitchFamily="34" charset="0"/>
+              </a:rPr>
               <a:t/>
             </a:r>
             <a:br>
-              <a:rPr lang="hu-HU" sz="2000" dirty="0"/>
-            </a:br>
-            <a:r>
-              <a:rPr lang="hu-HU" sz="2000" dirty="0"/>
+              <a:rPr lang="hu-HU" sz="2000" dirty="0">
+                <a:latin typeface="Bahnschrift" panose="020B0502040204020203" pitchFamily="34" charset="0"/>
+              </a:rPr>
+            </a:br>
+            <a:r>
+              <a:rPr lang="hu-HU" sz="2000" dirty="0">
+                <a:latin typeface="Bahnschrift" panose="020B0502040204020203" pitchFamily="34" charset="0"/>
+              </a:rPr>
               <a:t>Hogyan védjük személyes adatainkat?</a:t>
             </a:r>
             <a:br>
-              <a:rPr lang="hu-HU" sz="2000" dirty="0"/>
-            </a:br>
-            <a:r>
-              <a:rPr lang="hu-HU" sz="2000" dirty="0"/>
+              <a:rPr lang="hu-HU" sz="2000" dirty="0">
+                <a:latin typeface="Bahnschrift" panose="020B0502040204020203" pitchFamily="34" charset="0"/>
+              </a:rPr>
+            </a:br>
+            <a:r>
+              <a:rPr lang="hu-HU" sz="2000" dirty="0">
+                <a:latin typeface="Bahnschrift" panose="020B0502040204020203" pitchFamily="34" charset="0"/>
+              </a:rPr>
               <a:t>Mielőtt valamit közzéteszünk, gondoljuk végig:</a:t>
             </a:r>
           </a:p>
@@ -7389,91 +8068,141 @@
           <a:lstStyle/>
           <a:p>
             <a:r>
-              <a:rPr lang="hu-HU" sz="2400" dirty="0"/>
+              <a:rPr lang="hu-HU" sz="2400" dirty="0">
+                <a:latin typeface="Arial Rounded MT Bold" panose="020F0704030504030204" pitchFamily="34" charset="0"/>
+              </a:rPr>
               <a:t>Ki láthatja?</a:t>
             </a:r>
             <a:br>
-              <a:rPr lang="hu-HU" sz="2400" dirty="0"/>
-            </a:br>
-            <a:r>
-              <a:rPr lang="hu-HU" sz="2400" dirty="0"/>
+              <a:rPr lang="hu-HU" sz="2400" dirty="0">
+                <a:latin typeface="Arial Rounded MT Bold" panose="020F0704030504030204" pitchFamily="34" charset="0"/>
+              </a:rPr>
+            </a:br>
+            <a:r>
+              <a:rPr lang="hu-HU" sz="2400" dirty="0">
+                <a:latin typeface="Arial Rounded MT Bold" panose="020F0704030504030204" pitchFamily="34" charset="0"/>
+              </a:rPr>
               <a:t>Csak azok az emberek, akiknek valóban szeretnénk megmutatni?</a:t>
             </a:r>
             <a:br>
-              <a:rPr lang="hu-HU" sz="2400" dirty="0"/>
-            </a:br>
-            <a:r>
-              <a:rPr lang="hu-HU" sz="2400" dirty="0"/>
+              <a:rPr lang="hu-HU" sz="2400" dirty="0">
+                <a:latin typeface="Arial Rounded MT Bold" panose="020F0704030504030204" pitchFamily="34" charset="0"/>
+              </a:rPr>
+            </a:br>
+            <a:r>
+              <a:rPr lang="hu-HU" sz="2400" dirty="0">
+                <a:latin typeface="Arial Rounded MT Bold" panose="020F0704030504030204" pitchFamily="34" charset="0"/>
+              </a:rPr>
               <a:t/>
             </a:r>
             <a:br>
-              <a:rPr lang="hu-HU" sz="2400" dirty="0"/>
-            </a:br>
-            <a:r>
-              <a:rPr lang="hu-HU" sz="2400" dirty="0"/>
+              <a:rPr lang="hu-HU" sz="2400" dirty="0">
+                <a:latin typeface="Arial Rounded MT Bold" panose="020F0704030504030204" pitchFamily="34" charset="0"/>
+              </a:rPr>
+            </a:br>
+            <a:r>
+              <a:rPr lang="hu-HU" sz="2400" dirty="0">
+                <a:latin typeface="Arial Rounded MT Bold" panose="020F0704030504030204" pitchFamily="34" charset="0"/>
+              </a:rPr>
               <a:t>Szükséges megosztani?</a:t>
             </a:r>
             <a:br>
-              <a:rPr lang="hu-HU" sz="2400" dirty="0"/>
-            </a:br>
-            <a:r>
-              <a:rPr lang="hu-HU" sz="2400" dirty="0"/>
+              <a:rPr lang="hu-HU" sz="2400" dirty="0">
+                <a:latin typeface="Arial Rounded MT Bold" panose="020F0704030504030204" pitchFamily="34" charset="0"/>
+              </a:rPr>
+            </a:br>
+            <a:r>
+              <a:rPr lang="hu-HU" sz="2400" dirty="0">
+                <a:latin typeface="Arial Rounded MT Bold" panose="020F0704030504030204" pitchFamily="34" charset="0"/>
+              </a:rPr>
               <a:t>Valóban szükséges az adott személyes adat közzététele?</a:t>
             </a:r>
             <a:br>
-              <a:rPr lang="hu-HU" sz="2400" dirty="0"/>
-            </a:br>
-            <a:r>
-              <a:rPr lang="hu-HU" sz="2400" dirty="0"/>
+              <a:rPr lang="hu-HU" sz="2400" dirty="0">
+                <a:latin typeface="Arial Rounded MT Bold" panose="020F0704030504030204" pitchFamily="34" charset="0"/>
+              </a:rPr>
+            </a:br>
+            <a:r>
+              <a:rPr lang="hu-HU" sz="2400" dirty="0">
+                <a:latin typeface="Arial Rounded MT Bold" panose="020F0704030504030204" pitchFamily="34" charset="0"/>
+              </a:rPr>
               <a:t/>
             </a:r>
             <a:br>
-              <a:rPr lang="hu-HU" sz="2400" dirty="0"/>
-            </a:br>
-            <a:r>
-              <a:rPr lang="hu-HU" sz="2400" dirty="0"/>
+              <a:rPr lang="hu-HU" sz="2400" dirty="0">
+                <a:latin typeface="Arial Rounded MT Bold" panose="020F0704030504030204" pitchFamily="34" charset="0"/>
+              </a:rPr>
+            </a:br>
+            <a:r>
+              <a:rPr lang="hu-HU" sz="2400" dirty="0">
+                <a:latin typeface="Arial Rounded MT Bold" panose="020F0704030504030204" pitchFamily="34" charset="0"/>
+              </a:rPr>
               <a:t>Később is vállalnám?</a:t>
             </a:r>
             <a:br>
-              <a:rPr lang="hu-HU" sz="2400" dirty="0"/>
-            </a:br>
-            <a:r>
-              <a:rPr lang="hu-HU" sz="2400" dirty="0"/>
+              <a:rPr lang="hu-HU" sz="2400" dirty="0">
+                <a:latin typeface="Arial Rounded MT Bold" panose="020F0704030504030204" pitchFamily="34" charset="0"/>
+              </a:rPr>
+            </a:br>
+            <a:r>
+              <a:rPr lang="hu-HU" sz="2400" dirty="0">
+                <a:latin typeface="Arial Rounded MT Bold" panose="020F0704030504030204" pitchFamily="34" charset="0"/>
+              </a:rPr>
               <a:t>Kellemetlen lenne, ha ezt a képet vagy információt évekkel később is bárki látná?</a:t>
             </a:r>
             <a:br>
-              <a:rPr lang="hu-HU" sz="2400" dirty="0"/>
-            </a:br>
-            <a:r>
-              <a:rPr lang="hu-HU" sz="2400" dirty="0"/>
+              <a:rPr lang="hu-HU" sz="2400" dirty="0">
+                <a:latin typeface="Arial Rounded MT Bold" panose="020F0704030504030204" pitchFamily="34" charset="0"/>
+              </a:rPr>
+            </a:br>
+            <a:r>
+              <a:rPr lang="hu-HU" sz="2400" dirty="0">
+                <a:latin typeface="Arial Rounded MT Bold" panose="020F0704030504030204" pitchFamily="34" charset="0"/>
+              </a:rPr>
               <a:t/>
             </a:r>
             <a:br>
-              <a:rPr lang="hu-HU" sz="2400" dirty="0"/>
-            </a:br>
-            <a:r>
-              <a:rPr lang="hu-HU" sz="2400" dirty="0"/>
+              <a:rPr lang="hu-HU" sz="2400" dirty="0">
+                <a:latin typeface="Arial Rounded MT Bold" panose="020F0704030504030204" pitchFamily="34" charset="0"/>
+              </a:rPr>
+            </a:br>
+            <a:r>
+              <a:rPr lang="hu-HU" sz="2400" dirty="0">
+                <a:latin typeface="Arial Rounded MT Bold" panose="020F0704030504030204" pitchFamily="34" charset="0"/>
+              </a:rPr>
               <a:t>Mások adatainak tisztelete</a:t>
             </a:r>
             <a:br>
-              <a:rPr lang="hu-HU" sz="2400" dirty="0"/>
-            </a:br>
-            <a:r>
-              <a:rPr lang="hu-HU" sz="2400" dirty="0"/>
+              <a:rPr lang="hu-HU" sz="2400" dirty="0">
+                <a:latin typeface="Arial Rounded MT Bold" panose="020F0704030504030204" pitchFamily="34" charset="0"/>
+              </a:rPr>
+            </a:br>
+            <a:r>
+              <a:rPr lang="hu-HU" sz="2400" dirty="0">
+                <a:latin typeface="Arial Rounded MT Bold" panose="020F0704030504030204" pitchFamily="34" charset="0"/>
+              </a:rPr>
               <a:t>Nemcsak a saját adatainkra kell figyelnünk. Más ember fényképét, telefonszámát, üzenetét vagy más személyes adatát sem szabad engedély nélkül közzétenni.</a:t>
             </a:r>
             <a:br>
-              <a:rPr lang="hu-HU" sz="2400" dirty="0"/>
-            </a:br>
-            <a:r>
-              <a:rPr lang="hu-HU" sz="2400" dirty="0"/>
+              <a:rPr lang="hu-HU" sz="2400" dirty="0">
+                <a:latin typeface="Arial Rounded MT Bold" panose="020F0704030504030204" pitchFamily="34" charset="0"/>
+              </a:rPr>
+            </a:br>
+            <a:r>
+              <a:rPr lang="hu-HU" sz="2400" dirty="0">
+                <a:latin typeface="Arial Rounded MT Bold" panose="020F0704030504030204" pitchFamily="34" charset="0"/>
+              </a:rPr>
               <a:t/>
             </a:r>
             <a:br>
-              <a:rPr lang="hu-HU" sz="2400" dirty="0"/>
-            </a:br>
-            <a:r>
-              <a:rPr lang="hu-HU" sz="2400" dirty="0"/>
+              <a:rPr lang="hu-HU" sz="2400" dirty="0">
+                <a:latin typeface="Arial Rounded MT Bold" panose="020F0704030504030204" pitchFamily="34" charset="0"/>
+              </a:rPr>
+            </a:br>
+            <a:r>
+              <a:rPr lang="hu-HU" sz="2400" dirty="0">
+                <a:latin typeface="Arial Rounded MT Bold" panose="020F0704030504030204" pitchFamily="34" charset="0"/>
+              </a:rPr>
               <a:t>A biztonságos internet egyik alapja, hogy tiszteletben tartjuk mások magánszféráját is.</a:t>
             </a:r>
           </a:p>
@@ -7532,135 +8261,209 @@
           <a:lstStyle/>
           <a:p>
             <a:r>
-              <a:rPr lang="hu-HU" sz="1800" dirty="0"/>
+              <a:rPr lang="hu-HU" sz="1800" dirty="0">
+                <a:latin typeface="Bahnschrift" panose="020B0502040204020203" pitchFamily="34" charset="0"/>
+              </a:rPr>
               <a:t>Mi az online csalás?</a:t>
             </a:r>
             <a:br>
-              <a:rPr lang="hu-HU" sz="1800" dirty="0"/>
-            </a:br>
-            <a:r>
-              <a:rPr lang="hu-HU" sz="1800" dirty="0"/>
+              <a:rPr lang="hu-HU" sz="1800" dirty="0">
+                <a:latin typeface="Bahnschrift" panose="020B0502040204020203" pitchFamily="34" charset="0"/>
+              </a:rPr>
+            </a:br>
+            <a:r>
+              <a:rPr lang="hu-HU" sz="1800" dirty="0">
+                <a:latin typeface="Bahnschrift" panose="020B0502040204020203" pitchFamily="34" charset="0"/>
+              </a:rPr>
               <a:t>Az online csalók gyakran megpróbálják rávenni az embereket arra, hogy adják meg </a:t>
             </a:r>
             <a:r>
-              <a:rPr lang="hu-HU" sz="1800" dirty="0" err="1"/>
+              <a:rPr lang="hu-HU" sz="1800" dirty="0" err="1">
+                <a:latin typeface="Bahnschrift" panose="020B0502040204020203" pitchFamily="34" charset="0"/>
+              </a:rPr>
               <a:t>jelszavukat</a:t>
             </a:r>
             <a:r>
-              <a:rPr lang="hu-HU" sz="1800" dirty="0"/>
+              <a:rPr lang="hu-HU" sz="1800" dirty="0">
+                <a:latin typeface="Bahnschrift" panose="020B0502040204020203" pitchFamily="34" charset="0"/>
+              </a:rPr>
               <a:t>, banki adataikat, személyes </a:t>
             </a:r>
             <a:r>
-              <a:rPr lang="hu-HU" sz="1800" dirty="0" err="1"/>
+              <a:rPr lang="hu-HU" sz="1800" dirty="0" err="1">
+                <a:latin typeface="Bahnschrift" panose="020B0502040204020203" pitchFamily="34" charset="0"/>
+              </a:rPr>
               <a:t>információikat</a:t>
             </a:r>
             <a:r>
-              <a:rPr lang="hu-HU" sz="1800" dirty="0"/>
+              <a:rPr lang="hu-HU" sz="1800" dirty="0">
+                <a:latin typeface="Bahnschrift" panose="020B0502040204020203" pitchFamily="34" charset="0"/>
+              </a:rPr>
               <a:t> vagy pénzüket.</a:t>
             </a:r>
             <a:br>
-              <a:rPr lang="hu-HU" sz="1800" dirty="0"/>
-            </a:br>
-            <a:r>
-              <a:rPr lang="hu-HU" sz="1800" dirty="0"/>
+              <a:rPr lang="hu-HU" sz="1800" dirty="0">
+                <a:latin typeface="Bahnschrift" panose="020B0502040204020203" pitchFamily="34" charset="0"/>
+              </a:rPr>
+            </a:br>
+            <a:r>
+              <a:rPr lang="hu-HU" sz="1800" dirty="0">
+                <a:latin typeface="Bahnschrift" panose="020B0502040204020203" pitchFamily="34" charset="0"/>
+              </a:rPr>
               <a:t/>
             </a:r>
             <a:br>
-              <a:rPr lang="hu-HU" sz="1800" dirty="0"/>
-            </a:br>
-            <a:r>
-              <a:rPr lang="hu-HU" sz="1800" dirty="0"/>
+              <a:rPr lang="hu-HU" sz="1800" dirty="0">
+                <a:latin typeface="Bahnschrift" panose="020B0502040204020203" pitchFamily="34" charset="0"/>
+              </a:rPr>
+            </a:br>
+            <a:r>
+              <a:rPr lang="hu-HU" sz="1800" dirty="0">
+                <a:latin typeface="Bahnschrift" panose="020B0502040204020203" pitchFamily="34" charset="0"/>
+              </a:rPr>
               <a:t>Az egyik leggyakoribb módszer az adathalászat. Ilyenkor a csaló egy megbízható szervezetnek, például banknak, webáruháznak vagy ismert szolgáltatónak adja ki magát.</a:t>
             </a:r>
             <a:br>
-              <a:rPr lang="hu-HU" sz="1800" dirty="0"/>
-            </a:br>
-            <a:r>
-              <a:rPr lang="hu-HU" sz="1800" dirty="0"/>
+              <a:rPr lang="hu-HU" sz="1800" dirty="0">
+                <a:latin typeface="Bahnschrift" panose="020B0502040204020203" pitchFamily="34" charset="0"/>
+              </a:rPr>
+            </a:br>
+            <a:r>
+              <a:rPr lang="hu-HU" sz="1800" dirty="0">
+                <a:latin typeface="Bahnschrift" panose="020B0502040204020203" pitchFamily="34" charset="0"/>
+              </a:rPr>
               <a:t/>
             </a:r>
             <a:br>
-              <a:rPr lang="hu-HU" sz="1800" dirty="0"/>
-            </a:br>
-            <a:r>
-              <a:rPr lang="hu-HU" sz="1800" dirty="0"/>
+              <a:rPr lang="hu-HU" sz="1800" dirty="0">
+                <a:latin typeface="Bahnschrift" panose="020B0502040204020203" pitchFamily="34" charset="0"/>
+              </a:rPr>
+            </a:br>
+            <a:r>
+              <a:rPr lang="hu-HU" sz="1800" dirty="0">
+                <a:latin typeface="Bahnschrift" panose="020B0502040204020203" pitchFamily="34" charset="0"/>
+              </a:rPr>
               <a:t>Gyanús üzenetek felismerése</a:t>
             </a:r>
             <a:br>
-              <a:rPr lang="hu-HU" sz="1800" dirty="0"/>
-            </a:br>
-            <a:r>
-              <a:rPr lang="hu-HU" sz="1800" dirty="0"/>
+              <a:rPr lang="hu-HU" sz="1800" dirty="0">
+                <a:latin typeface="Bahnschrift" panose="020B0502040204020203" pitchFamily="34" charset="0"/>
+              </a:rPr>
+            </a:br>
+            <a:r>
+              <a:rPr lang="hu-HU" sz="1800" dirty="0">
+                <a:latin typeface="Bahnschrift" panose="020B0502040204020203" pitchFamily="34" charset="0"/>
+              </a:rPr>
               <a:t>Figyelmeztető jel lehet:</a:t>
             </a:r>
             <a:br>
-              <a:rPr lang="hu-HU" sz="1800" dirty="0"/>
-            </a:br>
-            <a:r>
-              <a:rPr lang="hu-HU" sz="1800" dirty="0"/>
+              <a:rPr lang="hu-HU" sz="1800" dirty="0">
+                <a:latin typeface="Bahnschrift" panose="020B0502040204020203" pitchFamily="34" charset="0"/>
+              </a:rPr>
+            </a:br>
+            <a:r>
+              <a:rPr lang="hu-HU" sz="1800" dirty="0">
+                <a:latin typeface="Bahnschrift" panose="020B0502040204020203" pitchFamily="34" charset="0"/>
+              </a:rPr>
               <a:t/>
             </a:r>
             <a:br>
-              <a:rPr lang="hu-HU" sz="1800" dirty="0"/>
-            </a:br>
-            <a:r>
-              <a:rPr lang="hu-HU" sz="1800" dirty="0"/>
+              <a:rPr lang="hu-HU" sz="1800" dirty="0">
+                <a:latin typeface="Bahnschrift" panose="020B0502040204020203" pitchFamily="34" charset="0"/>
+              </a:rPr>
+            </a:br>
+            <a:r>
+              <a:rPr lang="hu-HU" sz="1800" dirty="0">
+                <a:latin typeface="Bahnschrift" panose="020B0502040204020203" pitchFamily="34" charset="0"/>
+              </a:rPr>
               <a:t>sürgető vagy fenyegető szöveg;</a:t>
             </a:r>
             <a:br>
-              <a:rPr lang="hu-HU" sz="1800" dirty="0"/>
-            </a:br>
-            <a:r>
-              <a:rPr lang="hu-HU" sz="1800" dirty="0"/>
+              <a:rPr lang="hu-HU" sz="1800" dirty="0">
+                <a:latin typeface="Bahnschrift" panose="020B0502040204020203" pitchFamily="34" charset="0"/>
+              </a:rPr>
+            </a:br>
+            <a:r>
+              <a:rPr lang="hu-HU" sz="1800" dirty="0">
+                <a:latin typeface="Bahnschrift" panose="020B0502040204020203" pitchFamily="34" charset="0"/>
+              </a:rPr>
               <a:t>szokatlan feladó vagy e-mail-cím;</a:t>
             </a:r>
             <a:br>
-              <a:rPr lang="hu-HU" sz="1800" dirty="0"/>
-            </a:br>
-            <a:r>
-              <a:rPr lang="hu-HU" sz="1800" dirty="0"/>
+              <a:rPr lang="hu-HU" sz="1800" dirty="0">
+                <a:latin typeface="Bahnschrift" panose="020B0502040204020203" pitchFamily="34" charset="0"/>
+              </a:rPr>
+            </a:br>
+            <a:r>
+              <a:rPr lang="hu-HU" sz="1800" dirty="0">
+                <a:latin typeface="Bahnschrift" panose="020B0502040204020203" pitchFamily="34" charset="0"/>
+              </a:rPr>
               <a:t>gyanús hivatkozás;</a:t>
             </a:r>
             <a:br>
-              <a:rPr lang="hu-HU" sz="1800" dirty="0"/>
-            </a:br>
-            <a:r>
-              <a:rPr lang="hu-HU" sz="1800" dirty="0"/>
+              <a:rPr lang="hu-HU" sz="1800" dirty="0">
+                <a:latin typeface="Bahnschrift" panose="020B0502040204020203" pitchFamily="34" charset="0"/>
+              </a:rPr>
+            </a:br>
+            <a:r>
+              <a:rPr lang="hu-HU" sz="1800" dirty="0">
+                <a:latin typeface="Bahnschrift" panose="020B0502040204020203" pitchFamily="34" charset="0"/>
+              </a:rPr>
               <a:t>nyelvtani és helyesírási hibák;</a:t>
             </a:r>
             <a:br>
-              <a:rPr lang="hu-HU" sz="1800" dirty="0"/>
-            </a:br>
-            <a:r>
-              <a:rPr lang="hu-HU" sz="1800" dirty="0"/>
+              <a:rPr lang="hu-HU" sz="1800" dirty="0">
+                <a:latin typeface="Bahnschrift" panose="020B0502040204020203" pitchFamily="34" charset="0"/>
+              </a:rPr>
+            </a:br>
+            <a:r>
+              <a:rPr lang="hu-HU" sz="1800" dirty="0">
+                <a:latin typeface="Bahnschrift" panose="020B0502040204020203" pitchFamily="34" charset="0"/>
+              </a:rPr>
               <a:t>túl szépnek tűnő ajánlat;</a:t>
             </a:r>
             <a:br>
-              <a:rPr lang="hu-HU" sz="1800" dirty="0"/>
-            </a:br>
-            <a:r>
-              <a:rPr lang="hu-HU" sz="1800" dirty="0"/>
+              <a:rPr lang="hu-HU" sz="1800" dirty="0">
+                <a:latin typeface="Bahnschrift" panose="020B0502040204020203" pitchFamily="34" charset="0"/>
+              </a:rPr>
+            </a:br>
+            <a:r>
+              <a:rPr lang="hu-HU" sz="1800" dirty="0">
+                <a:latin typeface="Bahnschrift" panose="020B0502040204020203" pitchFamily="34" charset="0"/>
+              </a:rPr>
               <a:t>jelszó vagy banki adatok bekérése;</a:t>
             </a:r>
             <a:br>
-              <a:rPr lang="hu-HU" sz="1800" dirty="0"/>
-            </a:br>
-            <a:r>
-              <a:rPr lang="hu-HU" sz="1800" dirty="0"/>
+              <a:rPr lang="hu-HU" sz="1800" dirty="0">
+                <a:latin typeface="Bahnschrift" panose="020B0502040204020203" pitchFamily="34" charset="0"/>
+              </a:rPr>
+            </a:br>
+            <a:r>
+              <a:rPr lang="hu-HU" sz="1800" dirty="0">
+                <a:latin typeface="Bahnschrift" panose="020B0502040204020203" pitchFamily="34" charset="0"/>
+              </a:rPr>
               <a:t>ismeretlen melléklet.</a:t>
             </a:r>
             <a:br>
-              <a:rPr lang="hu-HU" sz="1800" dirty="0"/>
-            </a:br>
-            <a:r>
-              <a:rPr lang="hu-HU" sz="1800" dirty="0"/>
+              <a:rPr lang="hu-HU" sz="1800" dirty="0">
+                <a:latin typeface="Bahnschrift" panose="020B0502040204020203" pitchFamily="34" charset="0"/>
+              </a:rPr>
+            </a:br>
+            <a:r>
+              <a:rPr lang="hu-HU" sz="1800" dirty="0">
+                <a:latin typeface="Bahnschrift" panose="020B0502040204020203" pitchFamily="34" charset="0"/>
+              </a:rPr>
               <a:t>József esete</a:t>
             </a:r>
             <a:br>
-              <a:rPr lang="hu-HU" sz="1800" dirty="0"/>
-            </a:br>
-            <a:r>
-              <a:rPr lang="hu-HU" sz="1800" dirty="0"/>
+              <a:rPr lang="hu-HU" sz="1800" dirty="0">
+                <a:latin typeface="Bahnschrift" panose="020B0502040204020203" pitchFamily="34" charset="0"/>
+              </a:rPr>
+            </a:br>
+            <a:r>
+              <a:rPr lang="hu-HU" sz="1800" dirty="0">
+                <a:latin typeface="Bahnschrift" panose="020B0502040204020203" pitchFamily="34" charset="0"/>
+              </a:rPr>
               <a:t>József egy e-mailt kap, amely szerint nagyobb összeget nyert egy nyereményjátékon. Az üzenet arra kéri, hogy kattintson egy linkre, majd adja meg személyes és banki adatait.</a:t>
             </a:r>
           </a:p>
@@ -7689,10 +8492,14 @@
           <a:lstStyle/>
           <a:p>
             <a:r>
-              <a:rPr lang="hu-HU" sz="3600" b="1" dirty="0"/>
+              <a:rPr lang="hu-HU" sz="3600" b="1" dirty="0">
+                <a:latin typeface="Arial Rounded MT Bold" panose="020F0704030504030204" pitchFamily="34" charset="0"/>
+              </a:rPr>
               <a:t>Online csalások</a:t>
             </a:r>
-            <a:endParaRPr lang="hu-HU" sz="3600" dirty="0"/>
+            <a:endParaRPr lang="hu-HU" sz="3600" dirty="0">
+              <a:latin typeface="Arial Rounded MT Bold" panose="020F0704030504030204" pitchFamily="34" charset="0"/>
+            </a:endParaRPr>
           </a:p>
         </p:txBody>
       </p:sp>
